--- a/report/ParallelRoute_Review2_Deck.pptx
+++ b/report/ParallelRoute_Review2_Deck.pptx
@@ -24,6 +24,7 @@
     <p:sldId id="272" r:id="rId23"/>
     <p:sldId id="273" r:id="rId24"/>
     <p:sldId id="274" r:id="rId25"/>
+    <p:sldId id="275" r:id="rId26"/>
   </p:sldIdLst>
   <p:sldSz cx="12191695" cy="6858000" type="screen4x3"/>
   <p:notesSz cx="6858000" cy="9144000"/>
@@ -10533,7 +10534,7 @@
                 </a:solidFill>
                 <a:latin typeface="Calibri"/>
               </a:rPr>
-              <a:t>THE DTAM RESULT</a:t>
+              <a:t>RESULTS</a:t>
             </a:r>
           </a:p>
         </p:txBody>
@@ -10575,7 +10576,7 @@
                 </a:solidFill>
                 <a:latin typeface="Cambria"/>
               </a:rPr>
-              <a:t>Part 1: diversity collapses</a:t>
+              <a:t>Does the island model actually help? It depends on local search</a:t>
             </a:r>
           </a:p>
         </p:txBody>
@@ -10630,8 +10631,8 @@
         </p:nvSpPr>
         <p:spPr>
           <a:xfrm>
-            <a:off x="658368" y="1783080"/>
-            <a:ext cx="10874959" cy="329184"/>
+            <a:off x="658368" y="1874519"/>
+            <a:ext cx="10509199" cy="347472"/>
           </a:xfrm>
           <a:prstGeom prst="roundRect">
             <a:avLst>
@@ -10676,8 +10677,8 @@
         </p:nvSpPr>
         <p:spPr>
           <a:xfrm>
-            <a:off x="749808" y="1837944"/>
-            <a:ext cx="1353312" cy="329184"/>
+            <a:off x="749808" y="1929383"/>
+            <a:ext cx="1641805" cy="347472"/>
           </a:xfrm>
           <a:prstGeom prst="rect">
             <a:avLst/>
@@ -10699,13 +10700,13 @@
               </a:spcAft>
             </a:pPr>
             <a:r>
-              <a:rPr sz="1050" b="1">
+              <a:rPr sz="1150" b="1">
                 <a:solidFill>
                   <a:srgbClr val="FFFFFF"/>
                 </a:solidFill>
                 <a:latin typeface="Calibri"/>
               </a:rPr>
-              <a:t>generation</a:t>
+              <a:t>Landscape</a:t>
             </a:r>
           </a:p>
         </p:txBody>
@@ -10718,8 +10719,8 @@
         </p:nvSpPr>
         <p:spPr>
           <a:xfrm>
-            <a:off x="2212848" y="1837944"/>
-            <a:ext cx="1066761" cy="329184"/>
+            <a:off x="2501341" y="1929383"/>
+            <a:ext cx="1641805" cy="347472"/>
           </a:xfrm>
           <a:prstGeom prst="rect">
             <a:avLst/>
@@ -10741,13 +10742,13 @@
               </a:spcAft>
             </a:pPr>
             <a:r>
-              <a:rPr sz="1050" b="1">
+              <a:rPr sz="1150" b="1">
                 <a:solidFill>
                   <a:srgbClr val="FFFFFF"/>
                 </a:solidFill>
                 <a:latin typeface="Calibri"/>
               </a:rPr>
-              <a:t>10</a:t>
+              <a:t>2-opt</a:t>
             </a:r>
           </a:p>
         </p:txBody>
@@ -10760,8 +10761,8 @@
         </p:nvSpPr>
         <p:spPr>
           <a:xfrm>
-            <a:off x="3389337" y="1837944"/>
-            <a:ext cx="1066761" cy="329184"/>
+            <a:off x="4252874" y="1929383"/>
+            <a:ext cx="1641805" cy="347472"/>
           </a:xfrm>
           <a:prstGeom prst="rect">
             <a:avLst/>
@@ -10783,13 +10784,13 @@
               </a:spcAft>
             </a:pPr>
             <a:r>
-              <a:rPr sz="1050" b="1">
+              <a:rPr sz="1150" b="1">
                 <a:solidFill>
                   <a:srgbClr val="FFFFFF"/>
                 </a:solidFill>
                 <a:latin typeface="Calibri"/>
               </a:rPr>
-              <a:t>130</a:t>
+              <a:t>Serial</a:t>
             </a:r>
           </a:p>
         </p:txBody>
@@ -10802,8 +10803,8 @@
         </p:nvSpPr>
         <p:spPr>
           <a:xfrm>
-            <a:off x="4565826" y="1837944"/>
-            <a:ext cx="1066761" cy="329184"/>
+            <a:off x="6004407" y="1929383"/>
+            <a:ext cx="1641805" cy="347472"/>
           </a:xfrm>
           <a:prstGeom prst="rect">
             <a:avLst/>
@@ -10825,13 +10826,13 @@
               </a:spcAft>
             </a:pPr>
             <a:r>
-              <a:rPr sz="1050" b="1">
+              <a:rPr sz="1150" b="1">
                 <a:solidFill>
                   <a:srgbClr val="FFFFFF"/>
                 </a:solidFill>
                 <a:latin typeface="Calibri"/>
               </a:rPr>
-              <a:t>250</a:t>
+              <a:t>Island-fixed</a:t>
             </a:r>
           </a:p>
         </p:txBody>
@@ -10844,8 +10845,8 @@
         </p:nvSpPr>
         <p:spPr>
           <a:xfrm>
-            <a:off x="5742315" y="1837944"/>
-            <a:ext cx="1066761" cy="329184"/>
+            <a:off x="7755940" y="1929383"/>
+            <a:ext cx="1641805" cy="347472"/>
           </a:xfrm>
           <a:prstGeom prst="rect">
             <a:avLst/>
@@ -10867,13 +10868,13 @@
               </a:spcAft>
             </a:pPr>
             <a:r>
-              <a:rPr sz="1050" b="1">
+              <a:rPr sz="1150" b="1">
                 <a:solidFill>
                   <a:srgbClr val="FFFFFF"/>
                 </a:solidFill>
                 <a:latin typeface="Calibri"/>
               </a:rPr>
-              <a:t>370</a:t>
+              <a:t>Island-DTAM</a:t>
             </a:r>
           </a:p>
         </p:txBody>
@@ -10886,8 +10887,8 @@
         </p:nvSpPr>
         <p:spPr>
           <a:xfrm>
-            <a:off x="6918804" y="1837944"/>
-            <a:ext cx="1066761" cy="329184"/>
+            <a:off x="9507473" y="1929383"/>
+            <a:ext cx="1641805" cy="347472"/>
           </a:xfrm>
           <a:prstGeom prst="rect">
             <a:avLst/>
@@ -10909,13 +10910,13 @@
               </a:spcAft>
             </a:pPr>
             <a:r>
-              <a:rPr sz="1050" b="1">
+              <a:rPr sz="1150" b="1">
                 <a:solidFill>
                   <a:srgbClr val="FFFFFF"/>
                 </a:solidFill>
                 <a:latin typeface="Calibri"/>
               </a:rPr>
-              <a:t>610</a:t>
+              <a:t>Parallel vs serial</a:t>
             </a:r>
           </a:p>
         </p:txBody>
@@ -10928,8 +10929,50 @@
         </p:nvSpPr>
         <p:spPr>
           <a:xfrm>
-            <a:off x="8095293" y="1837944"/>
-            <a:ext cx="1066761" cy="329184"/>
+            <a:off x="749808" y="2276855"/>
+            <a:ext cx="1641805" cy="347472"/>
+          </a:xfrm>
+          <a:prstGeom prst="rect">
+            <a:avLst/>
+          </a:prstGeom>
+          <a:noFill/>
+        </p:spPr>
+        <p:txBody>
+          <a:bodyPr wrap="square" anchor="t" lIns="0" rIns="0" tIns="0" bIns="0">
+            <a:spAutoFit/>
+          </a:bodyPr>
+          <a:lstStyle/>
+          <a:p>
+            <a:pPr algn="l">
+              <a:lnSpc>
+                <a:spcPct val="100000"/>
+              </a:lnSpc>
+              <a:spcAft>
+                <a:spcPts val="0"/>
+              </a:spcAft>
+            </a:pPr>
+            <a:r>
+              <a:rPr sz="1150" b="0">
+                <a:solidFill>
+                  <a:srgbClr val="51697A"/>
+                </a:solidFill>
+                <a:latin typeface="Calibri"/>
+              </a:rPr>
+              <a:t>clustered-600</a:t>
+            </a:r>
+          </a:p>
+        </p:txBody>
+      </p:sp>
+      <p:sp>
+        <p:nvSpPr>
+          <p:cNvPr id="13" name="TextBox 12"/>
+          <p:cNvSpPr txBox="1"/>
+          <p:nvPr/>
+        </p:nvSpPr>
+        <p:spPr>
+          <a:xfrm>
+            <a:off x="2501341" y="2276855"/>
+            <a:ext cx="1641805" cy="347472"/>
           </a:xfrm>
           <a:prstGeom prst="rect">
             <a:avLst/>
@@ -10951,27 +10994,27 @@
               </a:spcAft>
             </a:pPr>
             <a:r>
-              <a:rPr sz="1050" b="1">
-                <a:solidFill>
-                  <a:srgbClr val="FFFFFF"/>
-                </a:solidFill>
-                <a:latin typeface="Calibri"/>
-              </a:rPr>
-              <a:t>730</a:t>
-            </a:r>
-          </a:p>
-        </p:txBody>
-      </p:sp>
-      <p:sp>
-        <p:nvSpPr>
-          <p:cNvPr id="13" name="TextBox 12"/>
-          <p:cNvSpPr txBox="1"/>
-          <p:nvPr/>
-        </p:nvSpPr>
-        <p:spPr>
-          <a:xfrm>
-            <a:off x="9271782" y="1837944"/>
-            <a:ext cx="1066761" cy="329184"/>
+              <a:rPr sz="1150" b="0">
+                <a:solidFill>
+                  <a:srgbClr val="51697A"/>
+                </a:solidFill>
+                <a:latin typeface="Calibri"/>
+              </a:rPr>
+              <a:t>off</a:t>
+            </a:r>
+          </a:p>
+        </p:txBody>
+      </p:sp>
+      <p:sp>
+        <p:nvSpPr>
+          <p:cNvPr id="14" name="TextBox 13"/>
+          <p:cNvSpPr txBox="1"/>
+          <p:nvPr/>
+        </p:nvSpPr>
+        <p:spPr>
+          <a:xfrm>
+            <a:off x="4252874" y="2276855"/>
+            <a:ext cx="1641805" cy="347472"/>
           </a:xfrm>
           <a:prstGeom prst="rect">
             <a:avLst/>
@@ -10993,27 +11036,27 @@
               </a:spcAft>
             </a:pPr>
             <a:r>
-              <a:rPr sz="1050" b="1">
-                <a:solidFill>
-                  <a:srgbClr val="FFFFFF"/>
-                </a:solidFill>
-                <a:latin typeface="Calibri"/>
-              </a:rPr>
-              <a:t>1090</a:t>
-            </a:r>
-          </a:p>
-        </p:txBody>
-      </p:sp>
-      <p:sp>
-        <p:nvSpPr>
-          <p:cNvPr id="14" name="TextBox 13"/>
-          <p:cNvSpPr txBox="1"/>
-          <p:nvPr/>
-        </p:nvSpPr>
-        <p:spPr>
-          <a:xfrm>
-            <a:off x="10448271" y="1837944"/>
-            <a:ext cx="1066761" cy="329184"/>
+              <a:rPr sz="1150" b="0">
+                <a:solidFill>
+                  <a:srgbClr val="51697A"/>
+                </a:solidFill>
+                <a:latin typeface="Calibri"/>
+              </a:rPr>
+              <a:t>27297.2</a:t>
+            </a:r>
+          </a:p>
+        </p:txBody>
+      </p:sp>
+      <p:sp>
+        <p:nvSpPr>
+          <p:cNvPr id="15" name="TextBox 14"/>
+          <p:cNvSpPr txBox="1"/>
+          <p:nvPr/>
+        </p:nvSpPr>
+        <p:spPr>
+          <a:xfrm>
+            <a:off x="6004407" y="2276855"/>
+            <a:ext cx="1641805" cy="347472"/>
           </a:xfrm>
           <a:prstGeom prst="rect">
             <a:avLst/>
@@ -11035,27 +11078,157 @@
               </a:spcAft>
             </a:pPr>
             <a:r>
-              <a:rPr sz="1050" b="1">
-                <a:solidFill>
-                  <a:srgbClr val="FFFFFF"/>
-                </a:solidFill>
-                <a:latin typeface="Calibri"/>
-              </a:rPr>
-              <a:t>1450</a:t>
-            </a:r>
-          </a:p>
-        </p:txBody>
-      </p:sp>
-      <p:sp>
-        <p:nvSpPr>
-          <p:cNvPr id="15" name="TextBox 14"/>
-          <p:cNvSpPr txBox="1"/>
-          <p:nvPr/>
-        </p:nvSpPr>
-        <p:spPr>
-          <a:xfrm>
-            <a:off x="749808" y="2167128"/>
-            <a:ext cx="1353312" cy="329184"/>
+              <a:rPr sz="1150" b="0">
+                <a:solidFill>
+                  <a:srgbClr val="51697A"/>
+                </a:solidFill>
+                <a:latin typeface="Calibri"/>
+              </a:rPr>
+              <a:t>7100.1</a:t>
+            </a:r>
+          </a:p>
+        </p:txBody>
+      </p:sp>
+      <p:sp>
+        <p:nvSpPr>
+          <p:cNvPr id="16" name="TextBox 15"/>
+          <p:cNvSpPr txBox="1"/>
+          <p:nvPr/>
+        </p:nvSpPr>
+        <p:spPr>
+          <a:xfrm>
+            <a:off x="7755940" y="2276855"/>
+            <a:ext cx="1641805" cy="347472"/>
+          </a:xfrm>
+          <a:prstGeom prst="rect">
+            <a:avLst/>
+          </a:prstGeom>
+          <a:noFill/>
+        </p:spPr>
+        <p:txBody>
+          <a:bodyPr wrap="square" anchor="t" lIns="0" rIns="0" tIns="0" bIns="0">
+            <a:spAutoFit/>
+          </a:bodyPr>
+          <a:lstStyle/>
+          <a:p>
+            <a:pPr algn="r">
+              <a:lnSpc>
+                <a:spcPct val="100000"/>
+              </a:lnSpc>
+              <a:spcAft>
+                <a:spcPts val="0"/>
+              </a:spcAft>
+            </a:pPr>
+            <a:r>
+              <a:rPr sz="1150" b="0">
+                <a:solidFill>
+                  <a:srgbClr val="51697A"/>
+                </a:solidFill>
+                <a:latin typeface="Calibri"/>
+              </a:rPr>
+              <a:t>7695.7</a:t>
+            </a:r>
+          </a:p>
+        </p:txBody>
+      </p:sp>
+      <p:sp>
+        <p:nvSpPr>
+          <p:cNvPr id="17" name="TextBox 16"/>
+          <p:cNvSpPr txBox="1"/>
+          <p:nvPr/>
+        </p:nvSpPr>
+        <p:spPr>
+          <a:xfrm>
+            <a:off x="9507473" y="2276855"/>
+            <a:ext cx="1641805" cy="347472"/>
+          </a:xfrm>
+          <a:prstGeom prst="rect">
+            <a:avLst/>
+          </a:prstGeom>
+          <a:noFill/>
+        </p:spPr>
+        <p:txBody>
+          <a:bodyPr wrap="square" anchor="t" lIns="0" rIns="0" tIns="0" bIns="0">
+            <a:spAutoFit/>
+          </a:bodyPr>
+          <a:lstStyle/>
+          <a:p>
+            <a:pPr algn="r">
+              <a:lnSpc>
+                <a:spcPct val="100000"/>
+              </a:lnSpc>
+              <a:spcAft>
+                <a:spcPts val="0"/>
+              </a:spcAft>
+            </a:pPr>
+            <a:r>
+              <a:rPr sz="1150" b="1">
+                <a:solidFill>
+                  <a:srgbClr val="1E7A5A"/>
+                </a:solidFill>
+                <a:latin typeface="Calibri"/>
+              </a:rPr>
+              <a:t>-74.0%</a:t>
+            </a:r>
+          </a:p>
+        </p:txBody>
+      </p:sp>
+      <p:sp>
+        <p:nvSpPr>
+          <p:cNvPr id="18" name="Rounded Rectangle 17"/>
+          <p:cNvSpPr/>
+          <p:nvPr/>
+        </p:nvSpPr>
+        <p:spPr>
+          <a:xfrm>
+            <a:off x="658368" y="2569463"/>
+            <a:ext cx="10509199" cy="347472"/>
+          </a:xfrm>
+          <a:prstGeom prst="roundRect">
+            <a:avLst>
+              <a:gd name="adj" fmla="val 4500"/>
+            </a:avLst>
+          </a:prstGeom>
+          <a:solidFill>
+            <a:srgbClr val="F7F9FA"/>
+          </a:solidFill>
+          <a:ln>
+            <a:noFill/>
+          </a:ln>
+          <a:effectLst/>
+        </p:spPr>
+        <p:style>
+          <a:lnRef idx="1">
+            <a:schemeClr val="accent1"/>
+          </a:lnRef>
+          <a:fillRef idx="3">
+            <a:schemeClr val="accent1"/>
+          </a:fillRef>
+          <a:effectRef idx="2">
+            <a:schemeClr val="accent1"/>
+          </a:effectRef>
+          <a:fontRef idx="minor">
+            <a:schemeClr val="lt1"/>
+          </a:fontRef>
+        </p:style>
+        <p:txBody>
+          <a:bodyPr rtlCol="0" anchor="ctr"/>
+          <a:lstStyle/>
+          <a:p>
+            <a:pPr algn="ctr"/>
+          </a:p>
+        </p:txBody>
+      </p:sp>
+      <p:sp>
+        <p:nvSpPr>
+          <p:cNvPr id="19" name="TextBox 18"/>
+          <p:cNvSpPr txBox="1"/>
+          <p:nvPr/>
+        </p:nvSpPr>
+        <p:spPr>
+          <a:xfrm>
+            <a:off x="749808" y="2624327"/>
+            <a:ext cx="1641805" cy="347472"/>
           </a:xfrm>
           <a:prstGeom prst="rect">
             <a:avLst/>
@@ -11077,27 +11250,27 @@
               </a:spcAft>
             </a:pPr>
             <a:r>
-              <a:rPr sz="1050" b="0">
+              <a:rPr sz="1150" b="0">
                 <a:solidFill>
                   <a:srgbClr val="51697A"/>
                 </a:solidFill>
                 <a:latin typeface="Calibri"/>
               </a:rPr>
-              <a:t>diversity</a:t>
-            </a:r>
-          </a:p>
-        </p:txBody>
-      </p:sp>
-      <p:sp>
-        <p:nvSpPr>
-          <p:cNvPr id="16" name="TextBox 15"/>
-          <p:cNvSpPr txBox="1"/>
-          <p:nvPr/>
-        </p:nvSpPr>
-        <p:spPr>
-          <a:xfrm>
-            <a:off x="2212848" y="2167128"/>
-            <a:ext cx="1066761" cy="329184"/>
+              <a:t>uniform-500</a:t>
+            </a:r>
+          </a:p>
+        </p:txBody>
+      </p:sp>
+      <p:sp>
+        <p:nvSpPr>
+          <p:cNvPr id="20" name="TextBox 19"/>
+          <p:cNvSpPr txBox="1"/>
+          <p:nvPr/>
+        </p:nvSpPr>
+        <p:spPr>
+          <a:xfrm>
+            <a:off x="2501341" y="2624327"/>
+            <a:ext cx="1641805" cy="347472"/>
           </a:xfrm>
           <a:prstGeom prst="rect">
             <a:avLst/>
@@ -11119,27 +11292,27 @@
               </a:spcAft>
             </a:pPr>
             <a:r>
-              <a:rPr sz="1050" b="0">
+              <a:rPr sz="1150" b="0">
                 <a:solidFill>
                   <a:srgbClr val="51697A"/>
                 </a:solidFill>
                 <a:latin typeface="Calibri"/>
               </a:rPr>
-              <a:t>0.224</a:t>
-            </a:r>
-          </a:p>
-        </p:txBody>
-      </p:sp>
-      <p:sp>
-        <p:nvSpPr>
-          <p:cNvPr id="17" name="TextBox 16"/>
-          <p:cNvSpPr txBox="1"/>
-          <p:nvPr/>
-        </p:nvSpPr>
-        <p:spPr>
-          <a:xfrm>
-            <a:off x="3389337" y="2167128"/>
-            <a:ext cx="1066761" cy="329184"/>
+              <a:t>off</a:t>
+            </a:r>
+          </a:p>
+        </p:txBody>
+      </p:sp>
+      <p:sp>
+        <p:nvSpPr>
+          <p:cNvPr id="21" name="TextBox 20"/>
+          <p:cNvSpPr txBox="1"/>
+          <p:nvPr/>
+        </p:nvSpPr>
+        <p:spPr>
+          <a:xfrm>
+            <a:off x="4252874" y="2624327"/>
+            <a:ext cx="1641805" cy="347472"/>
           </a:xfrm>
           <a:prstGeom prst="rect">
             <a:avLst/>
@@ -11161,27 +11334,27 @@
               </a:spcAft>
             </a:pPr>
             <a:r>
-              <a:rPr sz="1050" b="0">
+              <a:rPr sz="1150" b="0">
                 <a:solidFill>
                   <a:srgbClr val="51697A"/>
                 </a:solidFill>
                 <a:latin typeface="Calibri"/>
               </a:rPr>
-              <a:t>0.032</a:t>
-            </a:r>
-          </a:p>
-        </p:txBody>
-      </p:sp>
-      <p:sp>
-        <p:nvSpPr>
-          <p:cNvPr id="18" name="TextBox 17"/>
-          <p:cNvSpPr txBox="1"/>
-          <p:nvPr/>
-        </p:nvSpPr>
-        <p:spPr>
-          <a:xfrm>
-            <a:off x="4565826" y="2167128"/>
-            <a:ext cx="1066761" cy="329184"/>
+              <a:t>67353.2</a:t>
+            </a:r>
+          </a:p>
+        </p:txBody>
+      </p:sp>
+      <p:sp>
+        <p:nvSpPr>
+          <p:cNvPr id="22" name="TextBox 21"/>
+          <p:cNvSpPr txBox="1"/>
+          <p:nvPr/>
+        </p:nvSpPr>
+        <p:spPr>
+          <a:xfrm>
+            <a:off x="6004407" y="2624327"/>
+            <a:ext cx="1641805" cy="347472"/>
           </a:xfrm>
           <a:prstGeom prst="rect">
             <a:avLst/>
@@ -11203,27 +11376,27 @@
               </a:spcAft>
             </a:pPr>
             <a:r>
-              <a:rPr sz="1050" b="0">
+              <a:rPr sz="1150" b="0">
                 <a:solidFill>
                   <a:srgbClr val="51697A"/>
                 </a:solidFill>
                 <a:latin typeface="Calibri"/>
               </a:rPr>
-              <a:t>0.039</a:t>
-            </a:r>
-          </a:p>
-        </p:txBody>
-      </p:sp>
-      <p:sp>
-        <p:nvSpPr>
-          <p:cNvPr id="19" name="TextBox 18"/>
-          <p:cNvSpPr txBox="1"/>
-          <p:nvPr/>
-        </p:nvSpPr>
-        <p:spPr>
-          <a:xfrm>
-            <a:off x="5742315" y="2167128"/>
-            <a:ext cx="1066761" cy="329184"/>
+              <a:t>21046.2</a:t>
+            </a:r>
+          </a:p>
+        </p:txBody>
+      </p:sp>
+      <p:sp>
+        <p:nvSpPr>
+          <p:cNvPr id="23" name="TextBox 22"/>
+          <p:cNvSpPr txBox="1"/>
+          <p:nvPr/>
+        </p:nvSpPr>
+        <p:spPr>
+          <a:xfrm>
+            <a:off x="7755940" y="2624327"/>
+            <a:ext cx="1641805" cy="347472"/>
           </a:xfrm>
           <a:prstGeom prst="rect">
             <a:avLst/>
@@ -11245,27 +11418,27 @@
               </a:spcAft>
             </a:pPr>
             <a:r>
-              <a:rPr sz="1050" b="0">
+              <a:rPr sz="1150" b="0">
                 <a:solidFill>
                   <a:srgbClr val="51697A"/>
                 </a:solidFill>
                 <a:latin typeface="Calibri"/>
               </a:rPr>
-              <a:t>0.012</a:t>
-            </a:r>
-          </a:p>
-        </p:txBody>
-      </p:sp>
-      <p:sp>
-        <p:nvSpPr>
-          <p:cNvPr id="20" name="TextBox 19"/>
-          <p:cNvSpPr txBox="1"/>
-          <p:nvPr/>
-        </p:nvSpPr>
-        <p:spPr>
-          <a:xfrm>
-            <a:off x="6918804" y="2167128"/>
-            <a:ext cx="1066761" cy="329184"/>
+              <a:t>21274.7</a:t>
+            </a:r>
+          </a:p>
+        </p:txBody>
+      </p:sp>
+      <p:sp>
+        <p:nvSpPr>
+          <p:cNvPr id="24" name="TextBox 23"/>
+          <p:cNvSpPr txBox="1"/>
+          <p:nvPr/>
+        </p:nvSpPr>
+        <p:spPr>
+          <a:xfrm>
+            <a:off x="9507473" y="2624327"/>
+            <a:ext cx="1641805" cy="347472"/>
           </a:xfrm>
           <a:prstGeom prst="rect">
             <a:avLst/>
@@ -11287,27 +11460,69 @@
               </a:spcAft>
             </a:pPr>
             <a:r>
-              <a:rPr sz="1050" b="0">
+              <a:rPr sz="1150" b="1">
+                <a:solidFill>
+                  <a:srgbClr val="1E7A5A"/>
+                </a:solidFill>
+                <a:latin typeface="Calibri"/>
+              </a:rPr>
+              <a:t>-68.8%</a:t>
+            </a:r>
+          </a:p>
+        </p:txBody>
+      </p:sp>
+      <p:sp>
+        <p:nvSpPr>
+          <p:cNvPr id="25" name="TextBox 24"/>
+          <p:cNvSpPr txBox="1"/>
+          <p:nvPr/>
+        </p:nvSpPr>
+        <p:spPr>
+          <a:xfrm>
+            <a:off x="749808" y="2971799"/>
+            <a:ext cx="1641805" cy="347472"/>
+          </a:xfrm>
+          <a:prstGeom prst="rect">
+            <a:avLst/>
+          </a:prstGeom>
+          <a:noFill/>
+        </p:spPr>
+        <p:txBody>
+          <a:bodyPr wrap="square" anchor="t" lIns="0" rIns="0" tIns="0" bIns="0">
+            <a:spAutoFit/>
+          </a:bodyPr>
+          <a:lstStyle/>
+          <a:p>
+            <a:pPr algn="l">
+              <a:lnSpc>
+                <a:spcPct val="100000"/>
+              </a:lnSpc>
+              <a:spcAft>
+                <a:spcPts val="0"/>
+              </a:spcAft>
+            </a:pPr>
+            <a:r>
+              <a:rPr sz="1150" b="0">
                 <a:solidFill>
                   <a:srgbClr val="51697A"/>
                 </a:solidFill>
                 <a:latin typeface="Calibri"/>
               </a:rPr>
-              <a:t>0.010</a:t>
-            </a:r>
-          </a:p>
-        </p:txBody>
-      </p:sp>
-      <p:sp>
-        <p:nvSpPr>
-          <p:cNvPr id="21" name="TextBox 20"/>
-          <p:cNvSpPr txBox="1"/>
-          <p:nvPr/>
-        </p:nvSpPr>
-        <p:spPr>
-          <a:xfrm>
-            <a:off x="8095293" y="2167128"/>
-            <a:ext cx="1066761" cy="329184"/>
+              <a:t>clustered-600</a:t>
+            </a:r>
+          </a:p>
+        </p:txBody>
+      </p:sp>
+      <p:sp>
+        <p:nvSpPr>
+          <p:cNvPr id="26" name="TextBox 25"/>
+          <p:cNvSpPr txBox="1"/>
+          <p:nvPr/>
+        </p:nvSpPr>
+        <p:spPr>
+          <a:xfrm>
+            <a:off x="2501341" y="2971799"/>
+            <a:ext cx="1641805" cy="347472"/>
           </a:xfrm>
           <a:prstGeom prst="rect">
             <a:avLst/>
@@ -11329,27 +11544,27 @@
               </a:spcAft>
             </a:pPr>
             <a:r>
-              <a:rPr sz="1050" b="0">
+              <a:rPr sz="1150" b="0">
                 <a:solidFill>
                   <a:srgbClr val="51697A"/>
                 </a:solidFill>
                 <a:latin typeface="Calibri"/>
               </a:rPr>
-              <a:t>0.006</a:t>
-            </a:r>
-          </a:p>
-        </p:txBody>
-      </p:sp>
-      <p:sp>
-        <p:nvSpPr>
-          <p:cNvPr id="22" name="TextBox 21"/>
-          <p:cNvSpPr txBox="1"/>
-          <p:nvPr/>
-        </p:nvSpPr>
-        <p:spPr>
-          <a:xfrm>
-            <a:off x="9271782" y="2167128"/>
-            <a:ext cx="1066761" cy="329184"/>
+              <a:t>on</a:t>
+            </a:r>
+          </a:p>
+        </p:txBody>
+      </p:sp>
+      <p:sp>
+        <p:nvSpPr>
+          <p:cNvPr id="27" name="TextBox 26"/>
+          <p:cNvSpPr txBox="1"/>
+          <p:nvPr/>
+        </p:nvSpPr>
+        <p:spPr>
+          <a:xfrm>
+            <a:off x="4252874" y="2971799"/>
+            <a:ext cx="1641805" cy="347472"/>
           </a:xfrm>
           <a:prstGeom prst="rect">
             <a:avLst/>
@@ -11371,27 +11586,27 @@
               </a:spcAft>
             </a:pPr>
             <a:r>
-              <a:rPr sz="1050" b="0">
+              <a:rPr sz="1150" b="0">
                 <a:solidFill>
                   <a:srgbClr val="51697A"/>
                 </a:solidFill>
                 <a:latin typeface="Calibri"/>
               </a:rPr>
-              <a:t>0.005</a:t>
-            </a:r>
-          </a:p>
-        </p:txBody>
-      </p:sp>
-      <p:sp>
-        <p:nvSpPr>
-          <p:cNvPr id="23" name="TextBox 22"/>
-          <p:cNvSpPr txBox="1"/>
-          <p:nvPr/>
-        </p:nvSpPr>
-        <p:spPr>
-          <a:xfrm>
-            <a:off x="10448271" y="2167128"/>
-            <a:ext cx="1066761" cy="329184"/>
+              <a:t>5361.5</a:t>
+            </a:r>
+          </a:p>
+        </p:txBody>
+      </p:sp>
+      <p:sp>
+        <p:nvSpPr>
+          <p:cNvPr id="28" name="TextBox 27"/>
+          <p:cNvSpPr txBox="1"/>
+          <p:nvPr/>
+        </p:nvSpPr>
+        <p:spPr>
+          <a:xfrm>
+            <a:off x="6004407" y="2971799"/>
+            <a:ext cx="1641805" cy="347472"/>
           </a:xfrm>
           <a:prstGeom prst="rect">
             <a:avLst/>
@@ -11413,51 +11628,457 @@
               </a:spcAft>
             </a:pPr>
             <a:r>
-              <a:rPr sz="1050" b="0">
+              <a:rPr sz="1150" b="0">
                 <a:solidFill>
                   <a:srgbClr val="51697A"/>
                 </a:solidFill>
                 <a:latin typeface="Calibri"/>
               </a:rPr>
-              <a:t>0.004</a:t>
-            </a:r>
-          </a:p>
-        </p:txBody>
-      </p:sp>
-      <p:pic>
-        <p:nvPicPr>
-          <p:cNvPr id="24" name="Picture 23" descr="i5_tau_sweep.png"/>
-          <p:cNvPicPr>
-            <a:picLocks noChangeAspect="1"/>
-          </p:cNvPicPr>
-          <p:nvPr/>
-        </p:nvPicPr>
-        <p:blipFill>
-          <a:blip r:embed="rId2"/>
-          <a:stretch>
-            <a:fillRect/>
-          </a:stretch>
-        </p:blipFill>
-        <p:spPr>
-          <a:xfrm>
-            <a:off x="658368" y="2743200"/>
-            <a:ext cx="5437479" cy="3624986"/>
-          </a:xfrm>
-          <a:prstGeom prst="rect">
-            <a:avLst/>
-          </a:prstGeom>
-        </p:spPr>
-      </p:pic>
-      <p:sp>
-        <p:nvSpPr>
-          <p:cNvPr id="25" name="Rounded Rectangle 24"/>
+              <a:t>5320.9</a:t>
+            </a:r>
+          </a:p>
+        </p:txBody>
+      </p:sp>
+      <p:sp>
+        <p:nvSpPr>
+          <p:cNvPr id="29" name="TextBox 28"/>
+          <p:cNvSpPr txBox="1"/>
+          <p:nvPr/>
+        </p:nvSpPr>
+        <p:spPr>
+          <a:xfrm>
+            <a:off x="7755940" y="2971799"/>
+            <a:ext cx="1641805" cy="347472"/>
+          </a:xfrm>
+          <a:prstGeom prst="rect">
+            <a:avLst/>
+          </a:prstGeom>
+          <a:noFill/>
+        </p:spPr>
+        <p:txBody>
+          <a:bodyPr wrap="square" anchor="t" lIns="0" rIns="0" tIns="0" bIns="0">
+            <a:spAutoFit/>
+          </a:bodyPr>
+          <a:lstStyle/>
+          <a:p>
+            <a:pPr algn="r">
+              <a:lnSpc>
+                <a:spcPct val="100000"/>
+              </a:lnSpc>
+              <a:spcAft>
+                <a:spcPts val="0"/>
+              </a:spcAft>
+            </a:pPr>
+            <a:r>
+              <a:rPr sz="1150" b="0">
+                <a:solidFill>
+                  <a:srgbClr val="51697A"/>
+                </a:solidFill>
+                <a:latin typeface="Calibri"/>
+              </a:rPr>
+              <a:t>5331.8</a:t>
+            </a:r>
+          </a:p>
+        </p:txBody>
+      </p:sp>
+      <p:sp>
+        <p:nvSpPr>
+          <p:cNvPr id="30" name="TextBox 29"/>
+          <p:cNvSpPr txBox="1"/>
+          <p:nvPr/>
+        </p:nvSpPr>
+        <p:spPr>
+          <a:xfrm>
+            <a:off x="9507473" y="2971799"/>
+            <a:ext cx="1641805" cy="347472"/>
+          </a:xfrm>
+          <a:prstGeom prst="rect">
+            <a:avLst/>
+          </a:prstGeom>
+          <a:noFill/>
+        </p:spPr>
+        <p:txBody>
+          <a:bodyPr wrap="square" anchor="t" lIns="0" rIns="0" tIns="0" bIns="0">
+            <a:spAutoFit/>
+          </a:bodyPr>
+          <a:lstStyle/>
+          <a:p>
+            <a:pPr algn="r">
+              <a:lnSpc>
+                <a:spcPct val="100000"/>
+              </a:lnSpc>
+              <a:spcAft>
+                <a:spcPts val="0"/>
+              </a:spcAft>
+            </a:pPr>
+            <a:r>
+              <a:rPr sz="1150" b="1">
+                <a:solidFill>
+                  <a:srgbClr val="C0392B"/>
+                </a:solidFill>
+                <a:latin typeface="Calibri"/>
+              </a:rPr>
+              <a:t>-0.8%</a:t>
+            </a:r>
+          </a:p>
+        </p:txBody>
+      </p:sp>
+      <p:sp>
+        <p:nvSpPr>
+          <p:cNvPr id="31" name="Rounded Rectangle 30"/>
           <p:cNvSpPr/>
           <p:nvPr/>
         </p:nvSpPr>
         <p:spPr>
           <a:xfrm>
-            <a:off x="6639595" y="2852928"/>
-            <a:ext cx="50292" cy="173736"/>
+            <a:off x="658368" y="3264407"/>
+            <a:ext cx="10509199" cy="347472"/>
+          </a:xfrm>
+          <a:prstGeom prst="roundRect">
+            <a:avLst>
+              <a:gd name="adj" fmla="val 4500"/>
+            </a:avLst>
+          </a:prstGeom>
+          <a:solidFill>
+            <a:srgbClr val="F7F9FA"/>
+          </a:solidFill>
+          <a:ln>
+            <a:noFill/>
+          </a:ln>
+          <a:effectLst/>
+        </p:spPr>
+        <p:style>
+          <a:lnRef idx="1">
+            <a:schemeClr val="accent1"/>
+          </a:lnRef>
+          <a:fillRef idx="3">
+            <a:schemeClr val="accent1"/>
+          </a:fillRef>
+          <a:effectRef idx="2">
+            <a:schemeClr val="accent1"/>
+          </a:effectRef>
+          <a:fontRef idx="minor">
+            <a:schemeClr val="lt1"/>
+          </a:fontRef>
+        </p:style>
+        <p:txBody>
+          <a:bodyPr rtlCol="0" anchor="ctr"/>
+          <a:lstStyle/>
+          <a:p>
+            <a:pPr algn="ctr"/>
+          </a:p>
+        </p:txBody>
+      </p:sp>
+      <p:sp>
+        <p:nvSpPr>
+          <p:cNvPr id="32" name="TextBox 31"/>
+          <p:cNvSpPr txBox="1"/>
+          <p:nvPr/>
+        </p:nvSpPr>
+        <p:spPr>
+          <a:xfrm>
+            <a:off x="749808" y="3319271"/>
+            <a:ext cx="1641805" cy="347472"/>
+          </a:xfrm>
+          <a:prstGeom prst="rect">
+            <a:avLst/>
+          </a:prstGeom>
+          <a:noFill/>
+        </p:spPr>
+        <p:txBody>
+          <a:bodyPr wrap="square" anchor="t" lIns="0" rIns="0" tIns="0" bIns="0">
+            <a:spAutoFit/>
+          </a:bodyPr>
+          <a:lstStyle/>
+          <a:p>
+            <a:pPr algn="l">
+              <a:lnSpc>
+                <a:spcPct val="100000"/>
+              </a:lnSpc>
+              <a:spcAft>
+                <a:spcPts val="0"/>
+              </a:spcAft>
+            </a:pPr>
+            <a:r>
+              <a:rPr sz="1150" b="0">
+                <a:solidFill>
+                  <a:srgbClr val="51697A"/>
+                </a:solidFill>
+                <a:latin typeface="Calibri"/>
+              </a:rPr>
+              <a:t>uniform-500</a:t>
+            </a:r>
+          </a:p>
+        </p:txBody>
+      </p:sp>
+      <p:sp>
+        <p:nvSpPr>
+          <p:cNvPr id="33" name="TextBox 32"/>
+          <p:cNvSpPr txBox="1"/>
+          <p:nvPr/>
+        </p:nvSpPr>
+        <p:spPr>
+          <a:xfrm>
+            <a:off x="2501341" y="3319271"/>
+            <a:ext cx="1641805" cy="347472"/>
+          </a:xfrm>
+          <a:prstGeom prst="rect">
+            <a:avLst/>
+          </a:prstGeom>
+          <a:noFill/>
+        </p:spPr>
+        <p:txBody>
+          <a:bodyPr wrap="square" anchor="t" lIns="0" rIns="0" tIns="0" bIns="0">
+            <a:spAutoFit/>
+          </a:bodyPr>
+          <a:lstStyle/>
+          <a:p>
+            <a:pPr algn="r">
+              <a:lnSpc>
+                <a:spcPct val="100000"/>
+              </a:lnSpc>
+              <a:spcAft>
+                <a:spcPts val="0"/>
+              </a:spcAft>
+            </a:pPr>
+            <a:r>
+              <a:rPr sz="1150" b="0">
+                <a:solidFill>
+                  <a:srgbClr val="51697A"/>
+                </a:solidFill>
+                <a:latin typeface="Calibri"/>
+              </a:rPr>
+              <a:t>on</a:t>
+            </a:r>
+          </a:p>
+        </p:txBody>
+      </p:sp>
+      <p:sp>
+        <p:nvSpPr>
+          <p:cNvPr id="34" name="TextBox 33"/>
+          <p:cNvSpPr txBox="1"/>
+          <p:nvPr/>
+        </p:nvSpPr>
+        <p:spPr>
+          <a:xfrm>
+            <a:off x="4252874" y="3319271"/>
+            <a:ext cx="1641805" cy="347472"/>
+          </a:xfrm>
+          <a:prstGeom prst="rect">
+            <a:avLst/>
+          </a:prstGeom>
+          <a:noFill/>
+        </p:spPr>
+        <p:txBody>
+          <a:bodyPr wrap="square" anchor="t" lIns="0" rIns="0" tIns="0" bIns="0">
+            <a:spAutoFit/>
+          </a:bodyPr>
+          <a:lstStyle/>
+          <a:p>
+            <a:pPr algn="r">
+              <a:lnSpc>
+                <a:spcPct val="100000"/>
+              </a:lnSpc>
+              <a:spcAft>
+                <a:spcPts val="0"/>
+              </a:spcAft>
+            </a:pPr>
+            <a:r>
+              <a:rPr sz="1150" b="0">
+                <a:solidFill>
+                  <a:srgbClr val="51697A"/>
+                </a:solidFill>
+                <a:latin typeface="Calibri"/>
+              </a:rPr>
+              <a:t>17714.9</a:t>
+            </a:r>
+          </a:p>
+        </p:txBody>
+      </p:sp>
+      <p:sp>
+        <p:nvSpPr>
+          <p:cNvPr id="35" name="TextBox 34"/>
+          <p:cNvSpPr txBox="1"/>
+          <p:nvPr/>
+        </p:nvSpPr>
+        <p:spPr>
+          <a:xfrm>
+            <a:off x="6004407" y="3319271"/>
+            <a:ext cx="1641805" cy="347472"/>
+          </a:xfrm>
+          <a:prstGeom prst="rect">
+            <a:avLst/>
+          </a:prstGeom>
+          <a:noFill/>
+        </p:spPr>
+        <p:txBody>
+          <a:bodyPr wrap="square" anchor="t" lIns="0" rIns="0" tIns="0" bIns="0">
+            <a:spAutoFit/>
+          </a:bodyPr>
+          <a:lstStyle/>
+          <a:p>
+            <a:pPr algn="r">
+              <a:lnSpc>
+                <a:spcPct val="100000"/>
+              </a:lnSpc>
+              <a:spcAft>
+                <a:spcPts val="0"/>
+              </a:spcAft>
+            </a:pPr>
+            <a:r>
+              <a:rPr sz="1150" b="0">
+                <a:solidFill>
+                  <a:srgbClr val="51697A"/>
+                </a:solidFill>
+                <a:latin typeface="Calibri"/>
+              </a:rPr>
+              <a:t>17280.9</a:t>
+            </a:r>
+          </a:p>
+        </p:txBody>
+      </p:sp>
+      <p:sp>
+        <p:nvSpPr>
+          <p:cNvPr id="36" name="TextBox 35"/>
+          <p:cNvSpPr txBox="1"/>
+          <p:nvPr/>
+        </p:nvSpPr>
+        <p:spPr>
+          <a:xfrm>
+            <a:off x="7755940" y="3319271"/>
+            <a:ext cx="1641805" cy="347472"/>
+          </a:xfrm>
+          <a:prstGeom prst="rect">
+            <a:avLst/>
+          </a:prstGeom>
+          <a:noFill/>
+        </p:spPr>
+        <p:txBody>
+          <a:bodyPr wrap="square" anchor="t" lIns="0" rIns="0" tIns="0" bIns="0">
+            <a:spAutoFit/>
+          </a:bodyPr>
+          <a:lstStyle/>
+          <a:p>
+            <a:pPr algn="r">
+              <a:lnSpc>
+                <a:spcPct val="100000"/>
+              </a:lnSpc>
+              <a:spcAft>
+                <a:spcPts val="0"/>
+              </a:spcAft>
+            </a:pPr>
+            <a:r>
+              <a:rPr sz="1150" b="0">
+                <a:solidFill>
+                  <a:srgbClr val="51697A"/>
+                </a:solidFill>
+                <a:latin typeface="Calibri"/>
+              </a:rPr>
+              <a:t>17205.6</a:t>
+            </a:r>
+          </a:p>
+        </p:txBody>
+      </p:sp>
+      <p:sp>
+        <p:nvSpPr>
+          <p:cNvPr id="37" name="TextBox 36"/>
+          <p:cNvSpPr txBox="1"/>
+          <p:nvPr/>
+        </p:nvSpPr>
+        <p:spPr>
+          <a:xfrm>
+            <a:off x="9507473" y="3319271"/>
+            <a:ext cx="1641805" cy="347472"/>
+          </a:xfrm>
+          <a:prstGeom prst="rect">
+            <a:avLst/>
+          </a:prstGeom>
+          <a:noFill/>
+        </p:spPr>
+        <p:txBody>
+          <a:bodyPr wrap="square" anchor="t" lIns="0" rIns="0" tIns="0" bIns="0">
+            <a:spAutoFit/>
+          </a:bodyPr>
+          <a:lstStyle/>
+          <a:p>
+            <a:pPr algn="r">
+              <a:lnSpc>
+                <a:spcPct val="100000"/>
+              </a:lnSpc>
+              <a:spcAft>
+                <a:spcPts val="0"/>
+              </a:spcAft>
+            </a:pPr>
+            <a:r>
+              <a:rPr sz="1150" b="1">
+                <a:solidFill>
+                  <a:srgbClr val="C0392B"/>
+                </a:solidFill>
+                <a:latin typeface="Calibri"/>
+              </a:rPr>
+              <a:t>-2.5%</a:t>
+            </a:r>
+          </a:p>
+        </p:txBody>
+      </p:sp>
+      <p:sp>
+        <p:nvSpPr>
+          <p:cNvPr id="38" name="Rounded Rectangle 37"/>
+          <p:cNvSpPr/>
+          <p:nvPr/>
+        </p:nvSpPr>
+        <p:spPr>
+          <a:xfrm>
+            <a:off x="658368" y="3977639"/>
+            <a:ext cx="10509199" cy="1234440"/>
+          </a:xfrm>
+          <a:prstGeom prst="roundRect">
+            <a:avLst>
+              <a:gd name="adj" fmla="val 4500"/>
+            </a:avLst>
+          </a:prstGeom>
+          <a:solidFill>
+            <a:srgbClr val="FFFFFF"/>
+          </a:solidFill>
+          <a:ln w="12700">
+            <a:solidFill>
+              <a:srgbClr val="CFE0E9"/>
+            </a:solidFill>
+          </a:ln>
+          <a:effectLst/>
+        </p:spPr>
+        <p:style>
+          <a:lnRef idx="1">
+            <a:schemeClr val="accent1"/>
+          </a:lnRef>
+          <a:fillRef idx="3">
+            <a:schemeClr val="accent1"/>
+          </a:fillRef>
+          <a:effectRef idx="2">
+            <a:schemeClr val="accent1"/>
+          </a:effectRef>
+          <a:fontRef idx="minor">
+            <a:schemeClr val="lt1"/>
+          </a:fontRef>
+        </p:style>
+        <p:txBody>
+          <a:bodyPr rtlCol="0" anchor="ctr"/>
+          <a:lstStyle/>
+          <a:p>
+            <a:pPr algn="ctr"/>
+          </a:p>
+        </p:txBody>
+      </p:sp>
+      <p:sp>
+        <p:nvSpPr>
+          <p:cNvPr id="39" name="Rounded Rectangle 38"/>
+          <p:cNvSpPr/>
+          <p:nvPr/>
+        </p:nvSpPr>
+        <p:spPr>
+          <a:xfrm>
+            <a:off x="658368" y="3977639"/>
+            <a:ext cx="50292" cy="1234440"/>
           </a:xfrm>
           <a:prstGeom prst="roundRect">
             <a:avLst>
@@ -11496,14 +12117,14 @@
       </p:sp>
       <p:sp>
         <p:nvSpPr>
-          <p:cNvPr id="26" name="TextBox 25"/>
-          <p:cNvSpPr txBox="1"/>
-          <p:nvPr/>
-        </p:nvSpPr>
-        <p:spPr>
-          <a:xfrm>
-            <a:off x="6822475" y="2788920"/>
-            <a:ext cx="4710851" cy="914400"/>
+          <p:cNvPr id="40" name="TextBox 39"/>
+          <p:cNvSpPr txBox="1"/>
+          <p:nvPr/>
+        </p:nvSpPr>
+        <p:spPr>
+          <a:xfrm>
+            <a:off x="877824" y="4123943"/>
+            <a:ext cx="10088575" cy="274320"/>
           </a:xfrm>
           <a:prstGeom prst="rect">
             <a:avLst/>
@@ -11518,7 +12139,7 @@
           <a:p>
             <a:pPr algn="l">
               <a:lnSpc>
-                <a:spcPct val="122000"/>
+                <a:spcPct val="100000"/>
               </a:lnSpc>
               <a:spcAft>
                 <a:spcPts val="0"/>
@@ -11531,76 +12152,63 @@
                 </a:solidFill>
                 <a:latin typeface="Calibri"/>
               </a:rPr>
-              <a:t>Whole run.  </a:t>
-            </a:r>
-            <a:r>
-              <a:rPr sz="1150" b="0">
+              <a:t>Without local search the island engines find 68-74% shorter tours. With it, 0.8-2.5%.</a:t>
+            </a:r>
+          </a:p>
+        </p:txBody>
+      </p:sp>
+      <p:sp>
+        <p:nvSpPr>
+          <p:cNvPr id="41" name="TextBox 40"/>
+          <p:cNvSpPr txBox="1"/>
+          <p:nvPr/>
+        </p:nvSpPr>
+        <p:spPr>
+          <a:xfrm>
+            <a:off x="877824" y="4434839"/>
+            <a:ext cx="10088575" cy="667512"/>
+          </a:xfrm>
+          <a:prstGeom prst="rect">
+            <a:avLst/>
+          </a:prstGeom>
+          <a:noFill/>
+        </p:spPr>
+        <p:txBody>
+          <a:bodyPr wrap="square" anchor="t" lIns="0" rIns="0" tIns="0" bIns="0">
+            <a:spAutoFit/>
+          </a:bodyPr>
+          <a:lstStyle/>
+          <a:p>
+            <a:pPr algn="l">
+              <a:lnSpc>
+                <a:spcPct val="120000"/>
+              </a:lnSpc>
+              <a:spcAft>
+                <a:spcPts val="0"/>
+              </a:spcAft>
+            </a:pPr>
+            <a:r>
+              <a:rPr sz="1100" b="0">
                 <a:solidFill>
                   <a:srgbClr val="51697A"/>
                 </a:solidFill>
                 <a:latin typeface="Calibri"/>
               </a:rPr>
-              <a:t>min 0.0029, max 0.2236, mean 0.0181. Islands collapse to near-clones within ~100 generations.</a:t>
-            </a:r>
-          </a:p>
-        </p:txBody>
-      </p:sp>
-      <p:sp>
-        <p:nvSpPr>
-          <p:cNvPr id="27" name="Rounded Rectangle 26"/>
-          <p:cNvSpPr/>
-          <p:nvPr/>
-        </p:nvSpPr>
-        <p:spPr>
-          <a:xfrm>
-            <a:off x="6639595" y="3767328"/>
-            <a:ext cx="50292" cy="173736"/>
-          </a:xfrm>
-          <a:prstGeom prst="roundRect">
-            <a:avLst>
-              <a:gd name="adj" fmla="val 4500"/>
-            </a:avLst>
-          </a:prstGeom>
-          <a:solidFill>
-            <a:srgbClr val="F2A541"/>
-          </a:solidFill>
-          <a:ln>
-            <a:noFill/>
-          </a:ln>
-          <a:effectLst/>
-        </p:spPr>
-        <p:style>
-          <a:lnRef idx="1">
-            <a:schemeClr val="accent1"/>
-          </a:lnRef>
-          <a:fillRef idx="3">
-            <a:schemeClr val="accent1"/>
-          </a:fillRef>
-          <a:effectRef idx="2">
-            <a:schemeClr val="accent1"/>
-          </a:effectRef>
-          <a:fontRef idx="minor">
-            <a:schemeClr val="lt1"/>
-          </a:fontRef>
-        </p:style>
-        <p:txBody>
-          <a:bodyPr rtlCol="0" anchor="ctr"/>
-          <a:lstStyle/>
-          <a:p>
-            <a:pPr algn="ctr"/>
-          </a:p>
-        </p:txBody>
-      </p:sp>
-      <p:sp>
-        <p:nvSpPr>
-          <p:cNvPr id="28" name="TextBox 27"/>
-          <p:cNvSpPr txBox="1"/>
-          <p:nvPr/>
-        </p:nvSpPr>
-        <p:spPr>
-          <a:xfrm>
-            <a:off x="6822475" y="3703320"/>
-            <a:ext cx="4710851" cy="914400"/>
+              <a:t>2-opt does most of the optimisation and keeps even the serial GA competitive per generation. Review 1 quoted the 60-67% figure without stating that it holds only with local search disabled. A number reported without its operating conditions is not a result: this is the same methodological point as the epoch-length trade-off.</a:t>
+            </a:r>
+          </a:p>
+        </p:txBody>
+      </p:sp>
+      <p:sp>
+        <p:nvSpPr>
+          <p:cNvPr id="42" name="TextBox 41"/>
+          <p:cNvSpPr txBox="1"/>
+          <p:nvPr/>
+        </p:nvSpPr>
+        <p:spPr>
+          <a:xfrm>
+            <a:off x="658368" y="5440680"/>
+            <a:ext cx="10509199" cy="365760"/>
           </a:xfrm>
           <a:prstGeom prst="rect">
             <a:avLst/>
@@ -11615,58 +12223,7 @@
           <a:p>
             <a:pPr algn="l">
               <a:lnSpc>
-                <a:spcPct val="122000"/>
-              </a:lnSpc>
-              <a:spcAft>
-                <a:spcPts val="0"/>
-              </a:spcAft>
-            </a:pPr>
-            <a:r>
-              <a:rPr sz="1150" b="1">
-                <a:solidFill>
-                  <a:srgbClr val="0B3D5C"/>
-                </a:solidFill>
-                <a:latin typeface="Calibri"/>
-              </a:rPr>
-              <a:t>tau = 0.15 fires on 99.7% of island-epochs.  </a:t>
-            </a:r>
-            <a:r>
-              <a:rPr sz="1150" b="0">
-                <a:solidFill>
-                  <a:srgbClr val="51697A"/>
-                </a:solidFill>
-                <a:latin typeface="Calibri"/>
-              </a:rPr>
-              <a:t>It sits far above the metric's entire operating range. Only tau = 0 stops migration, and that is far worse (46382 vs ~31000).</a:t>
-            </a:r>
-          </a:p>
-        </p:txBody>
-      </p:sp>
-      <p:sp>
-        <p:nvSpPr>
-          <p:cNvPr id="29" name="TextBox 28"/>
-          <p:cNvSpPr txBox="1"/>
-          <p:nvPr/>
-        </p:nvSpPr>
-        <p:spPr>
-          <a:xfrm>
-            <a:off x="658368" y="6126480"/>
-            <a:ext cx="10874959" cy="274320"/>
-          </a:xfrm>
-          <a:prstGeom prst="rect">
-            <a:avLst/>
-          </a:prstGeom>
-          <a:noFill/>
-        </p:spPr>
-        <p:txBody>
-          <a:bodyPr wrap="square" anchor="t" lIns="0" rIns="0" tIns="0" bIns="0">
-            <a:spAutoFit/>
-          </a:bodyPr>
-          <a:lstStyle/>
-          <a:p>
-            <a:pPr algn="l">
-              <a:lnSpc>
-                <a:spcPct val="100000"/>
+                <a:spcPct val="115000"/>
               </a:lnSpc>
               <a:spcAft>
                 <a:spcPts val="0"/>
@@ -11679,7 +12236,7 @@
                 </a:solidFill>
                 <a:latin typeface="Calibri"/>
               </a:rPr>
-              <a:t>Figure: i5_tau_sweep.png - trigger rate vs tau, 100% down to 78.55% across the sweep.</a:t>
+              <a:t>Equal 4 s budget, 12 seeds, median tour length. On TSPLIB with local search all three engines are indistinguishable, because all of them reach the published optimum.</a:t>
             </a:r>
           </a:p>
         </p:txBody>
@@ -11789,7 +12346,7 @@
                 </a:solidFill>
                 <a:latin typeface="Cambria"/>
               </a:rPr>
-              <a:t>Part 2: donor availability 0.3-0.6%</a:t>
+              <a:t>Part 1: diversity collapses</a:t>
             </a:r>
           </a:p>
         </p:txBody>
@@ -11844,8 +12401,8 @@
         </p:nvSpPr>
         <p:spPr>
           <a:xfrm>
-            <a:off x="658368" y="1920240"/>
-            <a:ext cx="10874959" cy="1554480"/>
+            <a:off x="658368" y="1783080"/>
+            <a:ext cx="10874959" cy="329184"/>
           </a:xfrm>
           <a:prstGeom prst="roundRect">
             <a:avLst>
@@ -11853,12 +12410,10 @@
             </a:avLst>
           </a:prstGeom>
           <a:solidFill>
-            <a:srgbClr val="FFFFFF"/>
+            <a:srgbClr val="0B3D5C"/>
           </a:solidFill>
-          <a:ln w="12700">
-            <a:solidFill>
-              <a:srgbClr val="CFE0E9"/>
-            </a:solidFill>
+          <a:ln>
+            <a:noFill/>
           </a:ln>
           <a:effectLst/>
         </p:spPr>
@@ -11886,14 +12441,794 @@
       </p:sp>
       <p:sp>
         <p:nvSpPr>
-          <p:cNvPr id="6" name="Rounded Rectangle 5"/>
+          <p:cNvPr id="6" name="TextBox 5"/>
+          <p:cNvSpPr txBox="1"/>
+          <p:nvPr/>
+        </p:nvSpPr>
+        <p:spPr>
+          <a:xfrm>
+            <a:off x="749808" y="1837944"/>
+            <a:ext cx="1353312" cy="329184"/>
+          </a:xfrm>
+          <a:prstGeom prst="rect">
+            <a:avLst/>
+          </a:prstGeom>
+          <a:noFill/>
+        </p:spPr>
+        <p:txBody>
+          <a:bodyPr wrap="square" anchor="t" lIns="0" rIns="0" tIns="0" bIns="0">
+            <a:spAutoFit/>
+          </a:bodyPr>
+          <a:lstStyle/>
+          <a:p>
+            <a:pPr algn="l">
+              <a:lnSpc>
+                <a:spcPct val="100000"/>
+              </a:lnSpc>
+              <a:spcAft>
+                <a:spcPts val="0"/>
+              </a:spcAft>
+            </a:pPr>
+            <a:r>
+              <a:rPr sz="1050" b="1">
+                <a:solidFill>
+                  <a:srgbClr val="FFFFFF"/>
+                </a:solidFill>
+                <a:latin typeface="Calibri"/>
+              </a:rPr>
+              <a:t>generation</a:t>
+            </a:r>
+          </a:p>
+        </p:txBody>
+      </p:sp>
+      <p:sp>
+        <p:nvSpPr>
+          <p:cNvPr id="7" name="TextBox 6"/>
+          <p:cNvSpPr txBox="1"/>
+          <p:nvPr/>
+        </p:nvSpPr>
+        <p:spPr>
+          <a:xfrm>
+            <a:off x="2212848" y="1837944"/>
+            <a:ext cx="1066761" cy="329184"/>
+          </a:xfrm>
+          <a:prstGeom prst="rect">
+            <a:avLst/>
+          </a:prstGeom>
+          <a:noFill/>
+        </p:spPr>
+        <p:txBody>
+          <a:bodyPr wrap="square" anchor="t" lIns="0" rIns="0" tIns="0" bIns="0">
+            <a:spAutoFit/>
+          </a:bodyPr>
+          <a:lstStyle/>
+          <a:p>
+            <a:pPr algn="r">
+              <a:lnSpc>
+                <a:spcPct val="100000"/>
+              </a:lnSpc>
+              <a:spcAft>
+                <a:spcPts val="0"/>
+              </a:spcAft>
+            </a:pPr>
+            <a:r>
+              <a:rPr sz="1050" b="1">
+                <a:solidFill>
+                  <a:srgbClr val="FFFFFF"/>
+                </a:solidFill>
+                <a:latin typeface="Calibri"/>
+              </a:rPr>
+              <a:t>10</a:t>
+            </a:r>
+          </a:p>
+        </p:txBody>
+      </p:sp>
+      <p:sp>
+        <p:nvSpPr>
+          <p:cNvPr id="8" name="TextBox 7"/>
+          <p:cNvSpPr txBox="1"/>
+          <p:nvPr/>
+        </p:nvSpPr>
+        <p:spPr>
+          <a:xfrm>
+            <a:off x="3389337" y="1837944"/>
+            <a:ext cx="1066761" cy="329184"/>
+          </a:xfrm>
+          <a:prstGeom prst="rect">
+            <a:avLst/>
+          </a:prstGeom>
+          <a:noFill/>
+        </p:spPr>
+        <p:txBody>
+          <a:bodyPr wrap="square" anchor="t" lIns="0" rIns="0" tIns="0" bIns="0">
+            <a:spAutoFit/>
+          </a:bodyPr>
+          <a:lstStyle/>
+          <a:p>
+            <a:pPr algn="r">
+              <a:lnSpc>
+                <a:spcPct val="100000"/>
+              </a:lnSpc>
+              <a:spcAft>
+                <a:spcPts val="0"/>
+              </a:spcAft>
+            </a:pPr>
+            <a:r>
+              <a:rPr sz="1050" b="1">
+                <a:solidFill>
+                  <a:srgbClr val="FFFFFF"/>
+                </a:solidFill>
+                <a:latin typeface="Calibri"/>
+              </a:rPr>
+              <a:t>130</a:t>
+            </a:r>
+          </a:p>
+        </p:txBody>
+      </p:sp>
+      <p:sp>
+        <p:nvSpPr>
+          <p:cNvPr id="9" name="TextBox 8"/>
+          <p:cNvSpPr txBox="1"/>
+          <p:nvPr/>
+        </p:nvSpPr>
+        <p:spPr>
+          <a:xfrm>
+            <a:off x="4565826" y="1837944"/>
+            <a:ext cx="1066761" cy="329184"/>
+          </a:xfrm>
+          <a:prstGeom prst="rect">
+            <a:avLst/>
+          </a:prstGeom>
+          <a:noFill/>
+        </p:spPr>
+        <p:txBody>
+          <a:bodyPr wrap="square" anchor="t" lIns="0" rIns="0" tIns="0" bIns="0">
+            <a:spAutoFit/>
+          </a:bodyPr>
+          <a:lstStyle/>
+          <a:p>
+            <a:pPr algn="r">
+              <a:lnSpc>
+                <a:spcPct val="100000"/>
+              </a:lnSpc>
+              <a:spcAft>
+                <a:spcPts val="0"/>
+              </a:spcAft>
+            </a:pPr>
+            <a:r>
+              <a:rPr sz="1050" b="1">
+                <a:solidFill>
+                  <a:srgbClr val="FFFFFF"/>
+                </a:solidFill>
+                <a:latin typeface="Calibri"/>
+              </a:rPr>
+              <a:t>250</a:t>
+            </a:r>
+          </a:p>
+        </p:txBody>
+      </p:sp>
+      <p:sp>
+        <p:nvSpPr>
+          <p:cNvPr id="10" name="TextBox 9"/>
+          <p:cNvSpPr txBox="1"/>
+          <p:nvPr/>
+        </p:nvSpPr>
+        <p:spPr>
+          <a:xfrm>
+            <a:off x="5742315" y="1837944"/>
+            <a:ext cx="1066761" cy="329184"/>
+          </a:xfrm>
+          <a:prstGeom prst="rect">
+            <a:avLst/>
+          </a:prstGeom>
+          <a:noFill/>
+        </p:spPr>
+        <p:txBody>
+          <a:bodyPr wrap="square" anchor="t" lIns="0" rIns="0" tIns="0" bIns="0">
+            <a:spAutoFit/>
+          </a:bodyPr>
+          <a:lstStyle/>
+          <a:p>
+            <a:pPr algn="r">
+              <a:lnSpc>
+                <a:spcPct val="100000"/>
+              </a:lnSpc>
+              <a:spcAft>
+                <a:spcPts val="0"/>
+              </a:spcAft>
+            </a:pPr>
+            <a:r>
+              <a:rPr sz="1050" b="1">
+                <a:solidFill>
+                  <a:srgbClr val="FFFFFF"/>
+                </a:solidFill>
+                <a:latin typeface="Calibri"/>
+              </a:rPr>
+              <a:t>370</a:t>
+            </a:r>
+          </a:p>
+        </p:txBody>
+      </p:sp>
+      <p:sp>
+        <p:nvSpPr>
+          <p:cNvPr id="11" name="TextBox 10"/>
+          <p:cNvSpPr txBox="1"/>
+          <p:nvPr/>
+        </p:nvSpPr>
+        <p:spPr>
+          <a:xfrm>
+            <a:off x="6918804" y="1837944"/>
+            <a:ext cx="1066761" cy="329184"/>
+          </a:xfrm>
+          <a:prstGeom prst="rect">
+            <a:avLst/>
+          </a:prstGeom>
+          <a:noFill/>
+        </p:spPr>
+        <p:txBody>
+          <a:bodyPr wrap="square" anchor="t" lIns="0" rIns="0" tIns="0" bIns="0">
+            <a:spAutoFit/>
+          </a:bodyPr>
+          <a:lstStyle/>
+          <a:p>
+            <a:pPr algn="r">
+              <a:lnSpc>
+                <a:spcPct val="100000"/>
+              </a:lnSpc>
+              <a:spcAft>
+                <a:spcPts val="0"/>
+              </a:spcAft>
+            </a:pPr>
+            <a:r>
+              <a:rPr sz="1050" b="1">
+                <a:solidFill>
+                  <a:srgbClr val="FFFFFF"/>
+                </a:solidFill>
+                <a:latin typeface="Calibri"/>
+              </a:rPr>
+              <a:t>610</a:t>
+            </a:r>
+          </a:p>
+        </p:txBody>
+      </p:sp>
+      <p:sp>
+        <p:nvSpPr>
+          <p:cNvPr id="12" name="TextBox 11"/>
+          <p:cNvSpPr txBox="1"/>
+          <p:nvPr/>
+        </p:nvSpPr>
+        <p:spPr>
+          <a:xfrm>
+            <a:off x="8095293" y="1837944"/>
+            <a:ext cx="1066761" cy="329184"/>
+          </a:xfrm>
+          <a:prstGeom prst="rect">
+            <a:avLst/>
+          </a:prstGeom>
+          <a:noFill/>
+        </p:spPr>
+        <p:txBody>
+          <a:bodyPr wrap="square" anchor="t" lIns="0" rIns="0" tIns="0" bIns="0">
+            <a:spAutoFit/>
+          </a:bodyPr>
+          <a:lstStyle/>
+          <a:p>
+            <a:pPr algn="r">
+              <a:lnSpc>
+                <a:spcPct val="100000"/>
+              </a:lnSpc>
+              <a:spcAft>
+                <a:spcPts val="0"/>
+              </a:spcAft>
+            </a:pPr>
+            <a:r>
+              <a:rPr sz="1050" b="1">
+                <a:solidFill>
+                  <a:srgbClr val="FFFFFF"/>
+                </a:solidFill>
+                <a:latin typeface="Calibri"/>
+              </a:rPr>
+              <a:t>730</a:t>
+            </a:r>
+          </a:p>
+        </p:txBody>
+      </p:sp>
+      <p:sp>
+        <p:nvSpPr>
+          <p:cNvPr id="13" name="TextBox 12"/>
+          <p:cNvSpPr txBox="1"/>
+          <p:nvPr/>
+        </p:nvSpPr>
+        <p:spPr>
+          <a:xfrm>
+            <a:off x="9271782" y="1837944"/>
+            <a:ext cx="1066761" cy="329184"/>
+          </a:xfrm>
+          <a:prstGeom prst="rect">
+            <a:avLst/>
+          </a:prstGeom>
+          <a:noFill/>
+        </p:spPr>
+        <p:txBody>
+          <a:bodyPr wrap="square" anchor="t" lIns="0" rIns="0" tIns="0" bIns="0">
+            <a:spAutoFit/>
+          </a:bodyPr>
+          <a:lstStyle/>
+          <a:p>
+            <a:pPr algn="r">
+              <a:lnSpc>
+                <a:spcPct val="100000"/>
+              </a:lnSpc>
+              <a:spcAft>
+                <a:spcPts val="0"/>
+              </a:spcAft>
+            </a:pPr>
+            <a:r>
+              <a:rPr sz="1050" b="1">
+                <a:solidFill>
+                  <a:srgbClr val="FFFFFF"/>
+                </a:solidFill>
+                <a:latin typeface="Calibri"/>
+              </a:rPr>
+              <a:t>1090</a:t>
+            </a:r>
+          </a:p>
+        </p:txBody>
+      </p:sp>
+      <p:sp>
+        <p:nvSpPr>
+          <p:cNvPr id="14" name="TextBox 13"/>
+          <p:cNvSpPr txBox="1"/>
+          <p:nvPr/>
+        </p:nvSpPr>
+        <p:spPr>
+          <a:xfrm>
+            <a:off x="10448271" y="1837944"/>
+            <a:ext cx="1066761" cy="329184"/>
+          </a:xfrm>
+          <a:prstGeom prst="rect">
+            <a:avLst/>
+          </a:prstGeom>
+          <a:noFill/>
+        </p:spPr>
+        <p:txBody>
+          <a:bodyPr wrap="square" anchor="t" lIns="0" rIns="0" tIns="0" bIns="0">
+            <a:spAutoFit/>
+          </a:bodyPr>
+          <a:lstStyle/>
+          <a:p>
+            <a:pPr algn="r">
+              <a:lnSpc>
+                <a:spcPct val="100000"/>
+              </a:lnSpc>
+              <a:spcAft>
+                <a:spcPts val="0"/>
+              </a:spcAft>
+            </a:pPr>
+            <a:r>
+              <a:rPr sz="1050" b="1">
+                <a:solidFill>
+                  <a:srgbClr val="FFFFFF"/>
+                </a:solidFill>
+                <a:latin typeface="Calibri"/>
+              </a:rPr>
+              <a:t>1450</a:t>
+            </a:r>
+          </a:p>
+        </p:txBody>
+      </p:sp>
+      <p:sp>
+        <p:nvSpPr>
+          <p:cNvPr id="15" name="TextBox 14"/>
+          <p:cNvSpPr txBox="1"/>
+          <p:nvPr/>
+        </p:nvSpPr>
+        <p:spPr>
+          <a:xfrm>
+            <a:off x="749808" y="2167128"/>
+            <a:ext cx="1353312" cy="329184"/>
+          </a:xfrm>
+          <a:prstGeom prst="rect">
+            <a:avLst/>
+          </a:prstGeom>
+          <a:noFill/>
+        </p:spPr>
+        <p:txBody>
+          <a:bodyPr wrap="square" anchor="t" lIns="0" rIns="0" tIns="0" bIns="0">
+            <a:spAutoFit/>
+          </a:bodyPr>
+          <a:lstStyle/>
+          <a:p>
+            <a:pPr algn="l">
+              <a:lnSpc>
+                <a:spcPct val="100000"/>
+              </a:lnSpc>
+              <a:spcAft>
+                <a:spcPts val="0"/>
+              </a:spcAft>
+            </a:pPr>
+            <a:r>
+              <a:rPr sz="1050" b="0">
+                <a:solidFill>
+                  <a:srgbClr val="51697A"/>
+                </a:solidFill>
+                <a:latin typeface="Calibri"/>
+              </a:rPr>
+              <a:t>diversity</a:t>
+            </a:r>
+          </a:p>
+        </p:txBody>
+      </p:sp>
+      <p:sp>
+        <p:nvSpPr>
+          <p:cNvPr id="16" name="TextBox 15"/>
+          <p:cNvSpPr txBox="1"/>
+          <p:nvPr/>
+        </p:nvSpPr>
+        <p:spPr>
+          <a:xfrm>
+            <a:off x="2212848" y="2167128"/>
+            <a:ext cx="1066761" cy="329184"/>
+          </a:xfrm>
+          <a:prstGeom prst="rect">
+            <a:avLst/>
+          </a:prstGeom>
+          <a:noFill/>
+        </p:spPr>
+        <p:txBody>
+          <a:bodyPr wrap="square" anchor="t" lIns="0" rIns="0" tIns="0" bIns="0">
+            <a:spAutoFit/>
+          </a:bodyPr>
+          <a:lstStyle/>
+          <a:p>
+            <a:pPr algn="r">
+              <a:lnSpc>
+                <a:spcPct val="100000"/>
+              </a:lnSpc>
+              <a:spcAft>
+                <a:spcPts val="0"/>
+              </a:spcAft>
+            </a:pPr>
+            <a:r>
+              <a:rPr sz="1050" b="0">
+                <a:solidFill>
+                  <a:srgbClr val="51697A"/>
+                </a:solidFill>
+                <a:latin typeface="Calibri"/>
+              </a:rPr>
+              <a:t>0.224</a:t>
+            </a:r>
+          </a:p>
+        </p:txBody>
+      </p:sp>
+      <p:sp>
+        <p:nvSpPr>
+          <p:cNvPr id="17" name="TextBox 16"/>
+          <p:cNvSpPr txBox="1"/>
+          <p:nvPr/>
+        </p:nvSpPr>
+        <p:spPr>
+          <a:xfrm>
+            <a:off x="3389337" y="2167128"/>
+            <a:ext cx="1066761" cy="329184"/>
+          </a:xfrm>
+          <a:prstGeom prst="rect">
+            <a:avLst/>
+          </a:prstGeom>
+          <a:noFill/>
+        </p:spPr>
+        <p:txBody>
+          <a:bodyPr wrap="square" anchor="t" lIns="0" rIns="0" tIns="0" bIns="0">
+            <a:spAutoFit/>
+          </a:bodyPr>
+          <a:lstStyle/>
+          <a:p>
+            <a:pPr algn="r">
+              <a:lnSpc>
+                <a:spcPct val="100000"/>
+              </a:lnSpc>
+              <a:spcAft>
+                <a:spcPts val="0"/>
+              </a:spcAft>
+            </a:pPr>
+            <a:r>
+              <a:rPr sz="1050" b="0">
+                <a:solidFill>
+                  <a:srgbClr val="51697A"/>
+                </a:solidFill>
+                <a:latin typeface="Calibri"/>
+              </a:rPr>
+              <a:t>0.032</a:t>
+            </a:r>
+          </a:p>
+        </p:txBody>
+      </p:sp>
+      <p:sp>
+        <p:nvSpPr>
+          <p:cNvPr id="18" name="TextBox 17"/>
+          <p:cNvSpPr txBox="1"/>
+          <p:nvPr/>
+        </p:nvSpPr>
+        <p:spPr>
+          <a:xfrm>
+            <a:off x="4565826" y="2167128"/>
+            <a:ext cx="1066761" cy="329184"/>
+          </a:xfrm>
+          <a:prstGeom prst="rect">
+            <a:avLst/>
+          </a:prstGeom>
+          <a:noFill/>
+        </p:spPr>
+        <p:txBody>
+          <a:bodyPr wrap="square" anchor="t" lIns="0" rIns="0" tIns="0" bIns="0">
+            <a:spAutoFit/>
+          </a:bodyPr>
+          <a:lstStyle/>
+          <a:p>
+            <a:pPr algn="r">
+              <a:lnSpc>
+                <a:spcPct val="100000"/>
+              </a:lnSpc>
+              <a:spcAft>
+                <a:spcPts val="0"/>
+              </a:spcAft>
+            </a:pPr>
+            <a:r>
+              <a:rPr sz="1050" b="0">
+                <a:solidFill>
+                  <a:srgbClr val="51697A"/>
+                </a:solidFill>
+                <a:latin typeface="Calibri"/>
+              </a:rPr>
+              <a:t>0.039</a:t>
+            </a:r>
+          </a:p>
+        </p:txBody>
+      </p:sp>
+      <p:sp>
+        <p:nvSpPr>
+          <p:cNvPr id="19" name="TextBox 18"/>
+          <p:cNvSpPr txBox="1"/>
+          <p:nvPr/>
+        </p:nvSpPr>
+        <p:spPr>
+          <a:xfrm>
+            <a:off x="5742315" y="2167128"/>
+            <a:ext cx="1066761" cy="329184"/>
+          </a:xfrm>
+          <a:prstGeom prst="rect">
+            <a:avLst/>
+          </a:prstGeom>
+          <a:noFill/>
+        </p:spPr>
+        <p:txBody>
+          <a:bodyPr wrap="square" anchor="t" lIns="0" rIns="0" tIns="0" bIns="0">
+            <a:spAutoFit/>
+          </a:bodyPr>
+          <a:lstStyle/>
+          <a:p>
+            <a:pPr algn="r">
+              <a:lnSpc>
+                <a:spcPct val="100000"/>
+              </a:lnSpc>
+              <a:spcAft>
+                <a:spcPts val="0"/>
+              </a:spcAft>
+            </a:pPr>
+            <a:r>
+              <a:rPr sz="1050" b="0">
+                <a:solidFill>
+                  <a:srgbClr val="51697A"/>
+                </a:solidFill>
+                <a:latin typeface="Calibri"/>
+              </a:rPr>
+              <a:t>0.012</a:t>
+            </a:r>
+          </a:p>
+        </p:txBody>
+      </p:sp>
+      <p:sp>
+        <p:nvSpPr>
+          <p:cNvPr id="20" name="TextBox 19"/>
+          <p:cNvSpPr txBox="1"/>
+          <p:nvPr/>
+        </p:nvSpPr>
+        <p:spPr>
+          <a:xfrm>
+            <a:off x="6918804" y="2167128"/>
+            <a:ext cx="1066761" cy="329184"/>
+          </a:xfrm>
+          <a:prstGeom prst="rect">
+            <a:avLst/>
+          </a:prstGeom>
+          <a:noFill/>
+        </p:spPr>
+        <p:txBody>
+          <a:bodyPr wrap="square" anchor="t" lIns="0" rIns="0" tIns="0" bIns="0">
+            <a:spAutoFit/>
+          </a:bodyPr>
+          <a:lstStyle/>
+          <a:p>
+            <a:pPr algn="r">
+              <a:lnSpc>
+                <a:spcPct val="100000"/>
+              </a:lnSpc>
+              <a:spcAft>
+                <a:spcPts val="0"/>
+              </a:spcAft>
+            </a:pPr>
+            <a:r>
+              <a:rPr sz="1050" b="0">
+                <a:solidFill>
+                  <a:srgbClr val="51697A"/>
+                </a:solidFill>
+                <a:latin typeface="Calibri"/>
+              </a:rPr>
+              <a:t>0.010</a:t>
+            </a:r>
+          </a:p>
+        </p:txBody>
+      </p:sp>
+      <p:sp>
+        <p:nvSpPr>
+          <p:cNvPr id="21" name="TextBox 20"/>
+          <p:cNvSpPr txBox="1"/>
+          <p:nvPr/>
+        </p:nvSpPr>
+        <p:spPr>
+          <a:xfrm>
+            <a:off x="8095293" y="2167128"/>
+            <a:ext cx="1066761" cy="329184"/>
+          </a:xfrm>
+          <a:prstGeom prst="rect">
+            <a:avLst/>
+          </a:prstGeom>
+          <a:noFill/>
+        </p:spPr>
+        <p:txBody>
+          <a:bodyPr wrap="square" anchor="t" lIns="0" rIns="0" tIns="0" bIns="0">
+            <a:spAutoFit/>
+          </a:bodyPr>
+          <a:lstStyle/>
+          <a:p>
+            <a:pPr algn="r">
+              <a:lnSpc>
+                <a:spcPct val="100000"/>
+              </a:lnSpc>
+              <a:spcAft>
+                <a:spcPts val="0"/>
+              </a:spcAft>
+            </a:pPr>
+            <a:r>
+              <a:rPr sz="1050" b="0">
+                <a:solidFill>
+                  <a:srgbClr val="51697A"/>
+                </a:solidFill>
+                <a:latin typeface="Calibri"/>
+              </a:rPr>
+              <a:t>0.006</a:t>
+            </a:r>
+          </a:p>
+        </p:txBody>
+      </p:sp>
+      <p:sp>
+        <p:nvSpPr>
+          <p:cNvPr id="22" name="TextBox 21"/>
+          <p:cNvSpPr txBox="1"/>
+          <p:nvPr/>
+        </p:nvSpPr>
+        <p:spPr>
+          <a:xfrm>
+            <a:off x="9271782" y="2167128"/>
+            <a:ext cx="1066761" cy="329184"/>
+          </a:xfrm>
+          <a:prstGeom prst="rect">
+            <a:avLst/>
+          </a:prstGeom>
+          <a:noFill/>
+        </p:spPr>
+        <p:txBody>
+          <a:bodyPr wrap="square" anchor="t" lIns="0" rIns="0" tIns="0" bIns="0">
+            <a:spAutoFit/>
+          </a:bodyPr>
+          <a:lstStyle/>
+          <a:p>
+            <a:pPr algn="r">
+              <a:lnSpc>
+                <a:spcPct val="100000"/>
+              </a:lnSpc>
+              <a:spcAft>
+                <a:spcPts val="0"/>
+              </a:spcAft>
+            </a:pPr>
+            <a:r>
+              <a:rPr sz="1050" b="0">
+                <a:solidFill>
+                  <a:srgbClr val="51697A"/>
+                </a:solidFill>
+                <a:latin typeface="Calibri"/>
+              </a:rPr>
+              <a:t>0.005</a:t>
+            </a:r>
+          </a:p>
+        </p:txBody>
+      </p:sp>
+      <p:sp>
+        <p:nvSpPr>
+          <p:cNvPr id="23" name="TextBox 22"/>
+          <p:cNvSpPr txBox="1"/>
+          <p:nvPr/>
+        </p:nvSpPr>
+        <p:spPr>
+          <a:xfrm>
+            <a:off x="10448271" y="2167128"/>
+            <a:ext cx="1066761" cy="329184"/>
+          </a:xfrm>
+          <a:prstGeom prst="rect">
+            <a:avLst/>
+          </a:prstGeom>
+          <a:noFill/>
+        </p:spPr>
+        <p:txBody>
+          <a:bodyPr wrap="square" anchor="t" lIns="0" rIns="0" tIns="0" bIns="0">
+            <a:spAutoFit/>
+          </a:bodyPr>
+          <a:lstStyle/>
+          <a:p>
+            <a:pPr algn="r">
+              <a:lnSpc>
+                <a:spcPct val="100000"/>
+              </a:lnSpc>
+              <a:spcAft>
+                <a:spcPts val="0"/>
+              </a:spcAft>
+            </a:pPr>
+            <a:r>
+              <a:rPr sz="1050" b="0">
+                <a:solidFill>
+                  <a:srgbClr val="51697A"/>
+                </a:solidFill>
+                <a:latin typeface="Calibri"/>
+              </a:rPr>
+              <a:t>0.004</a:t>
+            </a:r>
+          </a:p>
+        </p:txBody>
+      </p:sp>
+      <p:pic>
+        <p:nvPicPr>
+          <p:cNvPr id="24" name="Picture 23" descr="i5_tau_sweep.png"/>
+          <p:cNvPicPr>
+            <a:picLocks noChangeAspect="1"/>
+          </p:cNvPicPr>
+          <p:nvPr/>
+        </p:nvPicPr>
+        <p:blipFill>
+          <a:blip r:embed="rId2"/>
+          <a:stretch>
+            <a:fillRect/>
+          </a:stretch>
+        </p:blipFill>
+        <p:spPr>
+          <a:xfrm>
+            <a:off x="658368" y="2743200"/>
+            <a:ext cx="5437479" cy="3624986"/>
+          </a:xfrm>
+          <a:prstGeom prst="rect">
+            <a:avLst/>
+          </a:prstGeom>
+        </p:spPr>
+      </p:pic>
+      <p:sp>
+        <p:nvSpPr>
+          <p:cNvPr id="25" name="Rounded Rectangle 24"/>
           <p:cNvSpPr/>
           <p:nvPr/>
         </p:nvSpPr>
         <p:spPr>
           <a:xfrm>
-            <a:off x="658368" y="1920240"/>
-            <a:ext cx="50292" cy="1554480"/>
+            <a:off x="6639595" y="2852928"/>
+            <a:ext cx="50292" cy="173736"/>
           </a:xfrm>
           <a:prstGeom prst="roundRect">
             <a:avLst>
@@ -11932,14 +13267,14 @@
       </p:sp>
       <p:sp>
         <p:nvSpPr>
-          <p:cNvPr id="7" name="TextBox 6"/>
-          <p:cNvSpPr txBox="1"/>
-          <p:nvPr/>
-        </p:nvSpPr>
-        <p:spPr>
-          <a:xfrm>
-            <a:off x="877824" y="2066544"/>
-            <a:ext cx="10454335" cy="274320"/>
+          <p:cNvPr id="26" name="TextBox 25"/>
+          <p:cNvSpPr txBox="1"/>
+          <p:nvPr/>
+        </p:nvSpPr>
+        <p:spPr>
+          <a:xfrm>
+            <a:off x="6822475" y="2788920"/>
+            <a:ext cx="4710851" cy="914400"/>
           </a:xfrm>
           <a:prstGeom prst="rect">
             <a:avLst/>
@@ -11954,7 +13289,7 @@
           <a:p>
             <a:pPr algn="l">
               <a:lnSpc>
-                <a:spcPct val="100000"/>
+                <a:spcPct val="122000"/>
               </a:lnSpc>
               <a:spcAft>
                 <a:spcPts val="0"/>
@@ -11967,62 +13302,29 @@
                 </a:solidFill>
                 <a:latin typeface="Calibri"/>
               </a:rPr>
-              <a:t>The key diagnostic of the project.</a:t>
-            </a:r>
-          </a:p>
-        </p:txBody>
-      </p:sp>
-      <p:sp>
-        <p:nvSpPr>
-          <p:cNvPr id="8" name="TextBox 7"/>
-          <p:cNvSpPr txBox="1"/>
-          <p:nvPr/>
-        </p:nvSpPr>
-        <p:spPr>
-          <a:xfrm>
-            <a:off x="877824" y="2377440"/>
-            <a:ext cx="10454335" cy="987552"/>
-          </a:xfrm>
-          <a:prstGeom prst="rect">
-            <a:avLst/>
-          </a:prstGeom>
-          <a:noFill/>
-        </p:spPr>
-        <p:txBody>
-          <a:bodyPr wrap="square" anchor="t" lIns="0" rIns="0" tIns="0" bIns="0">
-            <a:spAutoFit/>
-          </a:bodyPr>
-          <a:lstStyle/>
-          <a:p>
-            <a:pPr algn="l">
-              <a:lnSpc>
-                <a:spcPct val="120000"/>
-              </a:lnSpc>
-              <a:spcAft>
-                <a:spcPts val="0"/>
-              </a:spcAft>
-            </a:pPr>
-            <a:r>
-              <a:rPr sz="1100" b="0">
+              <a:t>Whole run.  </a:t>
+            </a:r>
+            <a:r>
+              <a:rPr sz="1150" b="0">
                 <a:solidFill>
                   <a:srgbClr val="51697A"/>
                 </a:solidFill>
                 <a:latin typeface="Calibri"/>
               </a:rPr>
-              <a:t>New instrumentation counts how often DTAM finds a genuinely non-stagnating donor, versus falling through to its “most distant island overall” fallback. Across the 10-seed factorial, stock DTAM finds a healthy donor on only 0.3-0.6% of migrations.</a:t>
-            </a:r>
-          </a:p>
-        </p:txBody>
-      </p:sp>
-      <p:sp>
-        <p:nvSpPr>
-          <p:cNvPr id="9" name="Rounded Rectangle 8"/>
+              <a:t>min 0.0029, max 0.2236, mean 0.0181. Islands collapse to near-clones within ~100 generations.</a:t>
+            </a:r>
+          </a:p>
+        </p:txBody>
+      </p:sp>
+      <p:sp>
+        <p:nvSpPr>
+          <p:cNvPr id="27" name="Rounded Rectangle 26"/>
           <p:cNvSpPr/>
           <p:nvPr/>
         </p:nvSpPr>
         <p:spPr>
           <a:xfrm>
-            <a:off x="658368" y="3813047"/>
+            <a:off x="6639595" y="3767328"/>
             <a:ext cx="50292" cy="173736"/>
           </a:xfrm>
           <a:prstGeom prst="roundRect">
@@ -12062,14 +13364,14 @@
       </p:sp>
       <p:sp>
         <p:nvSpPr>
-          <p:cNvPr id="10" name="TextBox 9"/>
-          <p:cNvSpPr txBox="1"/>
-          <p:nvPr/>
-        </p:nvSpPr>
-        <p:spPr>
-          <a:xfrm>
-            <a:off x="841248" y="3749039"/>
-            <a:ext cx="10692079" cy="914400"/>
+          <p:cNvPr id="28" name="TextBox 27"/>
+          <p:cNvSpPr txBox="1"/>
+          <p:nvPr/>
+        </p:nvSpPr>
+        <p:spPr>
+          <a:xfrm>
+            <a:off x="6822475" y="3703320"/>
+            <a:ext cx="4710851" cy="914400"/>
           </a:xfrm>
           <a:prstGeom prst="rect">
             <a:avLst/>
@@ -12091,82 +13393,36 @@
               </a:spcAft>
             </a:pPr>
             <a:r>
-              <a:rPr sz="1300" b="1">
+              <a:rPr sz="1150" b="1">
                 <a:solidFill>
                   <a:srgbClr val="0B3D5C"/>
                 </a:solidFill>
                 <a:latin typeface="Calibri"/>
               </a:rPr>
-              <a:t>The mechanism is almost never exercised as designed.  </a:t>
-            </a:r>
-            <a:r>
-              <a:rPr sz="1300" b="0">
+              <a:t>tau = 0.15 fires on 99.7% of island-epochs.  </a:t>
+            </a:r>
+            <a:r>
+              <a:rPr sz="1150" b="0">
                 <a:solidFill>
                   <a:srgbClr val="51697A"/>
                 </a:solidFill>
                 <a:latin typeface="Calibri"/>
               </a:rPr>
-              <a:t>On more than 99% of migrations the distant-source-pull mechanism - the project's actual contribution - does not fire as intended, because every island has collapsed simultaneously and there is no healthy donor to pull from.</a:t>
-            </a:r>
-          </a:p>
-        </p:txBody>
-      </p:sp>
-      <p:sp>
-        <p:nvSpPr>
-          <p:cNvPr id="11" name="Rounded Rectangle 10"/>
-          <p:cNvSpPr/>
-          <p:nvPr/>
-        </p:nvSpPr>
-        <p:spPr>
-          <a:xfrm>
-            <a:off x="658368" y="4727447"/>
-            <a:ext cx="50292" cy="173736"/>
-          </a:xfrm>
-          <a:prstGeom prst="roundRect">
-            <a:avLst>
-              <a:gd name="adj" fmla="val 4500"/>
-            </a:avLst>
-          </a:prstGeom>
-          <a:solidFill>
-            <a:srgbClr val="F2A541"/>
-          </a:solidFill>
-          <a:ln>
-            <a:noFill/>
-          </a:ln>
-          <a:effectLst/>
-        </p:spPr>
-        <p:style>
-          <a:lnRef idx="1">
-            <a:schemeClr val="accent1"/>
-          </a:lnRef>
-          <a:fillRef idx="3">
-            <a:schemeClr val="accent1"/>
-          </a:fillRef>
-          <a:effectRef idx="2">
-            <a:schemeClr val="accent1"/>
-          </a:effectRef>
-          <a:fontRef idx="minor">
-            <a:schemeClr val="lt1"/>
-          </a:fontRef>
-        </p:style>
-        <p:txBody>
-          <a:bodyPr rtlCol="0" anchor="ctr"/>
-          <a:lstStyle/>
-          <a:p>
-            <a:pPr algn="ctr"/>
-          </a:p>
-        </p:txBody>
-      </p:sp>
-      <p:sp>
-        <p:nvSpPr>
-          <p:cNvPr id="12" name="TextBox 11"/>
-          <p:cNvSpPr txBox="1"/>
-          <p:nvPr/>
-        </p:nvSpPr>
-        <p:spPr>
-          <a:xfrm>
-            <a:off x="841248" y="4663439"/>
-            <a:ext cx="10692079" cy="914400"/>
+              <a:t>It sits far above the metric's entire operating range. Only tau = 0 stops migration, and that is far worse (46382 vs ~31000).</a:t>
+            </a:r>
+          </a:p>
+        </p:txBody>
+      </p:sp>
+      <p:sp>
+        <p:nvSpPr>
+          <p:cNvPr id="29" name="TextBox 28"/>
+          <p:cNvSpPr txBox="1"/>
+          <p:nvPr/>
+        </p:nvSpPr>
+        <p:spPr>
+          <a:xfrm>
+            <a:off x="658368" y="6126480"/>
+            <a:ext cx="10874959" cy="274320"/>
           </a:xfrm>
           <a:prstGeom prst="rect">
             <a:avLst/>
@@ -12181,29 +13437,20 @@
           <a:p>
             <a:pPr algn="l">
               <a:lnSpc>
-                <a:spcPct val="122000"/>
-              </a:lnSpc>
-              <a:spcAft>
-                <a:spcPts val="0"/>
-              </a:spcAft>
-            </a:pPr>
-            <a:r>
-              <a:rPr sz="1300" b="1">
-                <a:solidFill>
-                  <a:srgbClr val="0B3D5C"/>
-                </a:solidFill>
-                <a:latin typeface="Calibri"/>
-              </a:rPr>
-              <a:t>Why this matters more than a null result.  </a:t>
-            </a:r>
-            <a:r>
-              <a:rPr sz="1300" b="0">
-                <a:solidFill>
-                  <a:srgbClr val="51697A"/>
-                </a:solidFill>
-                <a:latin typeface="Calibri"/>
-              </a:rPr>
-              <a:t>It identifies why DTAM does not beat fixed migration: the cause is premature convergence, not a flaw in the migration policy itself.</a:t>
+                <a:spcPct val="100000"/>
+              </a:lnSpc>
+              <a:spcAft>
+                <a:spcPts val="0"/>
+              </a:spcAft>
+            </a:pPr>
+            <a:r>
+              <a:rPr sz="1000" b="0">
+                <a:solidFill>
+                  <a:srgbClr val="AFC3D0"/>
+                </a:solidFill>
+                <a:latin typeface="Calibri"/>
+              </a:rPr>
+              <a:t>Figure: i5_tau_sweep.png - trigger rate vs tau, 100% down to 78.55% across the sweep.</a:t>
             </a:r>
           </a:p>
         </p:txBody>
@@ -12313,7 +13560,7 @@
                 </a:solidFill>
                 <a:latin typeface="Cambria"/>
               </a:rPr>
-              <a:t>Part 3: the E10 rescue factorial</a:t>
+              <a:t>Part 2: donor availability 0.3-0.6%</a:t>
             </a:r>
           </a:p>
         </p:txBody>
@@ -12360,234 +13607,16 @@
           </a:p>
         </p:txBody>
       </p:sp>
-      <p:pic>
-        <p:nvPicPr>
-          <p:cNvPr id="5" name="Picture 4" descr="i5_dtam_factorial.png"/>
-          <p:cNvPicPr>
-            <a:picLocks noChangeAspect="1"/>
-          </p:cNvPicPr>
-          <p:nvPr/>
-        </p:nvPicPr>
-        <p:blipFill>
-          <a:blip r:embed="rId2"/>
-          <a:stretch>
-            <a:fillRect/>
-          </a:stretch>
-        </p:blipFill>
-        <p:spPr>
-          <a:xfrm>
-            <a:off x="658368" y="1783080"/>
-            <a:ext cx="5872477" cy="2217160"/>
-          </a:xfrm>
-          <a:prstGeom prst="rect">
-            <a:avLst/>
-          </a:prstGeom>
-        </p:spPr>
-      </p:pic>
-      <p:sp>
-        <p:nvSpPr>
-          <p:cNvPr id="6" name="Rounded Rectangle 5"/>
+      <p:sp>
+        <p:nvSpPr>
+          <p:cNvPr id="5" name="Rounded Rectangle 4"/>
           <p:cNvSpPr/>
           <p:nvPr/>
         </p:nvSpPr>
         <p:spPr>
           <a:xfrm>
-            <a:off x="6965844" y="1847088"/>
-            <a:ext cx="50292" cy="173736"/>
-          </a:xfrm>
-          <a:prstGeom prst="roundRect">
-            <a:avLst>
-              <a:gd name="adj" fmla="val 4500"/>
-            </a:avLst>
-          </a:prstGeom>
-          <a:solidFill>
-            <a:srgbClr val="F2A541"/>
-          </a:solidFill>
-          <a:ln>
-            <a:noFill/>
-          </a:ln>
-          <a:effectLst/>
-        </p:spPr>
-        <p:style>
-          <a:lnRef idx="1">
-            <a:schemeClr val="accent1"/>
-          </a:lnRef>
-          <a:fillRef idx="3">
-            <a:schemeClr val="accent1"/>
-          </a:fillRef>
-          <a:effectRef idx="2">
-            <a:schemeClr val="accent1"/>
-          </a:effectRef>
-          <a:fontRef idx="minor">
-            <a:schemeClr val="lt1"/>
-          </a:fontRef>
-        </p:style>
-        <p:txBody>
-          <a:bodyPr rtlCol="0" anchor="ctr"/>
-          <a:lstStyle/>
-          <a:p>
-            <a:pPr algn="ctr"/>
-          </a:p>
-        </p:txBody>
-      </p:sp>
-      <p:sp>
-        <p:nvSpPr>
-          <p:cNvPr id="7" name="TextBox 6"/>
-          <p:cNvSpPr txBox="1"/>
-          <p:nvPr/>
-        </p:nvSpPr>
-        <p:spPr>
-          <a:xfrm>
-            <a:off x="7148724" y="1783080"/>
-            <a:ext cx="4384602" cy="1234440"/>
-          </a:xfrm>
-          <a:prstGeom prst="rect">
-            <a:avLst/>
-          </a:prstGeom>
-          <a:noFill/>
-        </p:spPr>
-        <p:txBody>
-          <a:bodyPr wrap="square" anchor="t" lIns="0" rIns="0" tIns="0" bIns="0">
-            <a:spAutoFit/>
-          </a:bodyPr>
-          <a:lstStyle/>
-          <a:p>
-            <a:pPr algn="l">
-              <a:lnSpc>
-                <a:spcPct val="122000"/>
-              </a:lnSpc>
-              <a:spcAft>
-                <a:spcPts val="0"/>
-              </a:spcAft>
-            </a:pPr>
-            <a:r>
-              <a:rPr sz="1150" b="1">
-                <a:solidFill>
-                  <a:srgbClr val="0B3D5C"/>
-                </a:solidFill>
-                <a:latin typeface="Calibri"/>
-              </a:rPr>
-              <a:t>Heterogeneous island parameters help.  </a:t>
-            </a:r>
-            <a:r>
-              <a:rPr sz="1150" b="0">
-                <a:solidFill>
-                  <a:srgbClr val="51697A"/>
-                </a:solidFill>
-                <a:latin typeface="Calibri"/>
-              </a:rPr>
-              <a:t>The only mechanism that consistently improves on stock DTAM (-2.8% uniform, -4.9% clustered); triples donor availability, but does not close the gap to fixed migration.</a:t>
-            </a:r>
-          </a:p>
-        </p:txBody>
-      </p:sp>
-      <p:sp>
-        <p:nvSpPr>
-          <p:cNvPr id="8" name="Rounded Rectangle 7"/>
-          <p:cNvSpPr/>
-          <p:nvPr/>
-        </p:nvSpPr>
-        <p:spPr>
-          <a:xfrm>
-            <a:off x="6965844" y="3081528"/>
-            <a:ext cx="50292" cy="173736"/>
-          </a:xfrm>
-          <a:prstGeom prst="roundRect">
-            <a:avLst>
-              <a:gd name="adj" fmla="val 4500"/>
-            </a:avLst>
-          </a:prstGeom>
-          <a:solidFill>
-            <a:srgbClr val="F2A541"/>
-          </a:solidFill>
-          <a:ln>
-            <a:noFill/>
-          </a:ln>
-          <a:effectLst/>
-        </p:spPr>
-        <p:style>
-          <a:lnRef idx="1">
-            <a:schemeClr val="accent1"/>
-          </a:lnRef>
-          <a:fillRef idx="3">
-            <a:schemeClr val="accent1"/>
-          </a:fillRef>
-          <a:effectRef idx="2">
-            <a:schemeClr val="accent1"/>
-          </a:effectRef>
-          <a:fontRef idx="minor">
-            <a:schemeClr val="lt1"/>
-          </a:fontRef>
-        </p:style>
-        <p:txBody>
-          <a:bodyPr rtlCol="0" anchor="ctr"/>
-          <a:lstStyle/>
-          <a:p>
-            <a:pPr algn="ctr"/>
-          </a:p>
-        </p:txBody>
-      </p:sp>
-      <p:sp>
-        <p:nvSpPr>
-          <p:cNvPr id="9" name="TextBox 8"/>
-          <p:cNvSpPr txBox="1"/>
-          <p:nvPr/>
-        </p:nvSpPr>
-        <p:spPr>
-          <a:xfrm>
-            <a:off x="7148724" y="3017520"/>
-            <a:ext cx="4384602" cy="1234440"/>
-          </a:xfrm>
-          <a:prstGeom prst="rect">
-            <a:avLst/>
-          </a:prstGeom>
-          <a:noFill/>
-        </p:spPr>
-        <p:txBody>
-          <a:bodyPr wrap="square" anchor="t" lIns="0" rIns="0" tIns="0" bIns="0">
-            <a:spAutoFit/>
-          </a:bodyPr>
-          <a:lstStyle/>
-          <a:p>
-            <a:pPr algn="l">
-              <a:lnSpc>
-                <a:spcPct val="122000"/>
-              </a:lnSpc>
-              <a:spcAft>
-                <a:spcPts val="0"/>
-              </a:spcAft>
-            </a:pPr>
-            <a:r>
-              <a:rPr sz="1150" b="1">
-                <a:solidFill>
-                  <a:srgbClr val="0B3D5C"/>
-                </a:solidFill>
-                <a:latin typeface="Calibri"/>
-              </a:rPr>
-              <a:t>The relative trigger works exactly as designed - and that makes it worse.  </a:t>
-            </a:r>
-            <a:r>
-              <a:rPr sz="1150" b="0">
-                <a:solidFill>
-                  <a:srgbClr val="51697A"/>
-                </a:solidFill>
-                <a:latin typeface="Calibri"/>
-              </a:rPr>
-              <a:t>Discrimination is restored (99.8% -&gt; ~31% firing, donor availability -&gt; 100%), and quality drops 18-20%, because migration is the dominant source of genetic material once islands collapse.</a:t>
-            </a:r>
-          </a:p>
-        </p:txBody>
-      </p:sp>
-      <p:sp>
-        <p:nvSpPr>
-          <p:cNvPr id="10" name="Rounded Rectangle 9"/>
-          <p:cNvSpPr/>
-          <p:nvPr/>
-        </p:nvSpPr>
-        <p:spPr>
-          <a:xfrm>
-            <a:off x="658368" y="5394960"/>
-            <a:ext cx="10874959" cy="868680"/>
+            <a:off x="658368" y="1920240"/>
+            <a:ext cx="10874959" cy="1554480"/>
           </a:xfrm>
           <a:prstGeom prst="roundRect">
             <a:avLst>
@@ -12628,14 +13657,14 @@
       </p:sp>
       <p:sp>
         <p:nvSpPr>
-          <p:cNvPr id="11" name="Rounded Rectangle 10"/>
+          <p:cNvPr id="6" name="Rounded Rectangle 5"/>
           <p:cNvSpPr/>
           <p:nvPr/>
         </p:nvSpPr>
         <p:spPr>
           <a:xfrm>
-            <a:off x="658368" y="5394960"/>
-            <a:ext cx="50292" cy="868680"/>
+            <a:off x="658368" y="1920240"/>
+            <a:ext cx="50292" cy="1554480"/>
           </a:xfrm>
           <a:prstGeom prst="roundRect">
             <a:avLst>
@@ -12674,14 +13703,241 @@
       </p:sp>
       <p:sp>
         <p:nvSpPr>
+          <p:cNvPr id="7" name="TextBox 6"/>
+          <p:cNvSpPr txBox="1"/>
+          <p:nvPr/>
+        </p:nvSpPr>
+        <p:spPr>
+          <a:xfrm>
+            <a:off x="877824" y="2066544"/>
+            <a:ext cx="10454335" cy="274320"/>
+          </a:xfrm>
+          <a:prstGeom prst="rect">
+            <a:avLst/>
+          </a:prstGeom>
+          <a:noFill/>
+        </p:spPr>
+        <p:txBody>
+          <a:bodyPr wrap="square" anchor="t" lIns="0" rIns="0" tIns="0" bIns="0">
+            <a:spAutoFit/>
+          </a:bodyPr>
+          <a:lstStyle/>
+          <a:p>
+            <a:pPr algn="l">
+              <a:lnSpc>
+                <a:spcPct val="100000"/>
+              </a:lnSpc>
+              <a:spcAft>
+                <a:spcPts val="0"/>
+              </a:spcAft>
+            </a:pPr>
+            <a:r>
+              <a:rPr sz="1150" b="1">
+                <a:solidFill>
+                  <a:srgbClr val="0B3D5C"/>
+                </a:solidFill>
+                <a:latin typeface="Calibri"/>
+              </a:rPr>
+              <a:t>The key diagnostic of the project.</a:t>
+            </a:r>
+          </a:p>
+        </p:txBody>
+      </p:sp>
+      <p:sp>
+        <p:nvSpPr>
+          <p:cNvPr id="8" name="TextBox 7"/>
+          <p:cNvSpPr txBox="1"/>
+          <p:nvPr/>
+        </p:nvSpPr>
+        <p:spPr>
+          <a:xfrm>
+            <a:off x="877824" y="2377440"/>
+            <a:ext cx="10454335" cy="987552"/>
+          </a:xfrm>
+          <a:prstGeom prst="rect">
+            <a:avLst/>
+          </a:prstGeom>
+          <a:noFill/>
+        </p:spPr>
+        <p:txBody>
+          <a:bodyPr wrap="square" anchor="t" lIns="0" rIns="0" tIns="0" bIns="0">
+            <a:spAutoFit/>
+          </a:bodyPr>
+          <a:lstStyle/>
+          <a:p>
+            <a:pPr algn="l">
+              <a:lnSpc>
+                <a:spcPct val="120000"/>
+              </a:lnSpc>
+              <a:spcAft>
+                <a:spcPts val="0"/>
+              </a:spcAft>
+            </a:pPr>
+            <a:r>
+              <a:rPr sz="1100" b="0">
+                <a:solidFill>
+                  <a:srgbClr val="51697A"/>
+                </a:solidFill>
+                <a:latin typeface="Calibri"/>
+              </a:rPr>
+              <a:t>New instrumentation counts how often DTAM finds a genuinely non-stagnating donor, versus falling through to its “most distant island overall” fallback. Across the 10-seed factorial, stock DTAM finds a healthy donor on only 0.3-0.6% of migrations.</a:t>
+            </a:r>
+          </a:p>
+        </p:txBody>
+      </p:sp>
+      <p:sp>
+        <p:nvSpPr>
+          <p:cNvPr id="9" name="Rounded Rectangle 8"/>
+          <p:cNvSpPr/>
+          <p:nvPr/>
+        </p:nvSpPr>
+        <p:spPr>
+          <a:xfrm>
+            <a:off x="658368" y="3813047"/>
+            <a:ext cx="50292" cy="173736"/>
+          </a:xfrm>
+          <a:prstGeom prst="roundRect">
+            <a:avLst>
+              <a:gd name="adj" fmla="val 4500"/>
+            </a:avLst>
+          </a:prstGeom>
+          <a:solidFill>
+            <a:srgbClr val="F2A541"/>
+          </a:solidFill>
+          <a:ln>
+            <a:noFill/>
+          </a:ln>
+          <a:effectLst/>
+        </p:spPr>
+        <p:style>
+          <a:lnRef idx="1">
+            <a:schemeClr val="accent1"/>
+          </a:lnRef>
+          <a:fillRef idx="3">
+            <a:schemeClr val="accent1"/>
+          </a:fillRef>
+          <a:effectRef idx="2">
+            <a:schemeClr val="accent1"/>
+          </a:effectRef>
+          <a:fontRef idx="minor">
+            <a:schemeClr val="lt1"/>
+          </a:fontRef>
+        </p:style>
+        <p:txBody>
+          <a:bodyPr rtlCol="0" anchor="ctr"/>
+          <a:lstStyle/>
+          <a:p>
+            <a:pPr algn="ctr"/>
+          </a:p>
+        </p:txBody>
+      </p:sp>
+      <p:sp>
+        <p:nvSpPr>
+          <p:cNvPr id="10" name="TextBox 9"/>
+          <p:cNvSpPr txBox="1"/>
+          <p:nvPr/>
+        </p:nvSpPr>
+        <p:spPr>
+          <a:xfrm>
+            <a:off x="841248" y="3749039"/>
+            <a:ext cx="10692079" cy="914400"/>
+          </a:xfrm>
+          <a:prstGeom prst="rect">
+            <a:avLst/>
+          </a:prstGeom>
+          <a:noFill/>
+        </p:spPr>
+        <p:txBody>
+          <a:bodyPr wrap="square" anchor="t" lIns="0" rIns="0" tIns="0" bIns="0">
+            <a:spAutoFit/>
+          </a:bodyPr>
+          <a:lstStyle/>
+          <a:p>
+            <a:pPr algn="l">
+              <a:lnSpc>
+                <a:spcPct val="122000"/>
+              </a:lnSpc>
+              <a:spcAft>
+                <a:spcPts val="0"/>
+              </a:spcAft>
+            </a:pPr>
+            <a:r>
+              <a:rPr sz="1300" b="1">
+                <a:solidFill>
+                  <a:srgbClr val="0B3D5C"/>
+                </a:solidFill>
+                <a:latin typeface="Calibri"/>
+              </a:rPr>
+              <a:t>The mechanism is almost never exercised as designed.  </a:t>
+            </a:r>
+            <a:r>
+              <a:rPr sz="1300" b="0">
+                <a:solidFill>
+                  <a:srgbClr val="51697A"/>
+                </a:solidFill>
+                <a:latin typeface="Calibri"/>
+              </a:rPr>
+              <a:t>On more than 99% of migrations the distant-source-pull mechanism - the project's actual contribution - does not fire as intended, because every island has collapsed simultaneously and there is no healthy donor to pull from.</a:t>
+            </a:r>
+          </a:p>
+        </p:txBody>
+      </p:sp>
+      <p:sp>
+        <p:nvSpPr>
+          <p:cNvPr id="11" name="Rounded Rectangle 10"/>
+          <p:cNvSpPr/>
+          <p:nvPr/>
+        </p:nvSpPr>
+        <p:spPr>
+          <a:xfrm>
+            <a:off x="658368" y="4727447"/>
+            <a:ext cx="50292" cy="173736"/>
+          </a:xfrm>
+          <a:prstGeom prst="roundRect">
+            <a:avLst>
+              <a:gd name="adj" fmla="val 4500"/>
+            </a:avLst>
+          </a:prstGeom>
+          <a:solidFill>
+            <a:srgbClr val="F2A541"/>
+          </a:solidFill>
+          <a:ln>
+            <a:noFill/>
+          </a:ln>
+          <a:effectLst/>
+        </p:spPr>
+        <p:style>
+          <a:lnRef idx="1">
+            <a:schemeClr val="accent1"/>
+          </a:lnRef>
+          <a:fillRef idx="3">
+            <a:schemeClr val="accent1"/>
+          </a:fillRef>
+          <a:effectRef idx="2">
+            <a:schemeClr val="accent1"/>
+          </a:effectRef>
+          <a:fontRef idx="minor">
+            <a:schemeClr val="lt1"/>
+          </a:fontRef>
+        </p:style>
+        <p:txBody>
+          <a:bodyPr rtlCol="0" anchor="ctr"/>
+          <a:lstStyle/>
+          <a:p>
+            <a:pPr algn="ctr"/>
+          </a:p>
+        </p:txBody>
+      </p:sp>
+      <p:sp>
+        <p:nvSpPr>
           <p:cNvPr id="12" name="TextBox 11"/>
           <p:cNvSpPr txBox="1"/>
           <p:nvPr/>
         </p:nvSpPr>
         <p:spPr>
           <a:xfrm>
-            <a:off x="877824" y="5541264"/>
-            <a:ext cx="10454335" cy="274320"/>
+            <a:off x="841248" y="4663439"/>
+            <a:ext cx="10692079" cy="914400"/>
           </a:xfrm>
           <a:prstGeom prst="rect">
             <a:avLst/>
@@ -12696,62 +13952,29 @@
           <a:p>
             <a:pPr algn="l">
               <a:lnSpc>
-                <a:spcPct val="100000"/>
-              </a:lnSpc>
-              <a:spcAft>
-                <a:spcPts val="0"/>
-              </a:spcAft>
-            </a:pPr>
-            <a:r>
-              <a:rPr sz="1150" b="1">
+                <a:spcPct val="122000"/>
+              </a:lnSpc>
+              <a:spcAft>
+                <a:spcPts val="0"/>
+              </a:spcAft>
+            </a:pPr>
+            <a:r>
+              <a:rPr sz="1300" b="1">
                 <a:solidFill>
                   <a:srgbClr val="0B3D5C"/>
                 </a:solidFill>
                 <a:latin typeface="Calibri"/>
               </a:rPr>
-              <a:t>DTAM's core premise is wrong for this problem.</a:t>
-            </a:r>
-          </a:p>
-        </p:txBody>
-      </p:sp>
-      <p:sp>
-        <p:nvSpPr>
-          <p:cNvPr id="13" name="TextBox 12"/>
-          <p:cNvSpPr txBox="1"/>
-          <p:nvPr/>
-        </p:nvSpPr>
-        <p:spPr>
-          <a:xfrm>
-            <a:off x="877824" y="5852160"/>
-            <a:ext cx="10454335" cy="301752"/>
-          </a:xfrm>
-          <a:prstGeom prst="rect">
-            <a:avLst/>
-          </a:prstGeom>
-          <a:noFill/>
-        </p:spPr>
-        <p:txBody>
-          <a:bodyPr wrap="square" anchor="t" lIns="0" rIns="0" tIns="0" bIns="0">
-            <a:spAutoFit/>
-          </a:bodyPr>
-          <a:lstStyle/>
-          <a:p>
-            <a:pPr algn="l">
-              <a:lnSpc>
-                <a:spcPct val="120000"/>
-              </a:lnSpc>
-              <a:spcAft>
-                <a:spcPts val="0"/>
-              </a:spcAft>
-            </a:pPr>
-            <a:r>
-              <a:rPr sz="1100" b="0">
+              <a:t>Why this matters more than a null result.  </a:t>
+            </a:r>
+            <a:r>
+              <a:rPr sz="1300" b="0">
                 <a:solidFill>
                   <a:srgbClr val="51697A"/>
                 </a:solidFill>
                 <a:latin typeface="Calibri"/>
               </a:rPr>
-              <a:t>The right policy here is to migrate constantly, demonstrated mechanistically rather than asserted.</a:t>
+              <a:t>It identifies why DTAM does not beat fixed migration: the cause is premature convergence, not a flaw in the migration policy itself.</a:t>
             </a:r>
           </a:p>
         </p:txBody>
@@ -12819,7 +14042,7 @@
                 </a:solidFill>
                 <a:latin typeface="Calibri"/>
               </a:rPr>
-              <a:t>NOVELTY</a:t>
+              <a:t>THE DTAM RESULT</a:t>
             </a:r>
           </a:p>
         </p:txBody>
@@ -12861,7 +14084,7 @@
                 </a:solidFill>
                 <a:latin typeface="Cambria"/>
               </a:rPr>
-              <a:t>Novelty, honestly stated</a:t>
+              <a:t>Part 3: the E10 rescue factorial</a:t>
             </a:r>
           </a:p>
         </p:txBody>
@@ -12908,15 +14131,39 @@
           </a:p>
         </p:txBody>
       </p:sp>
-      <p:sp>
-        <p:nvSpPr>
-          <p:cNvPr id="5" name="Rounded Rectangle 4"/>
+      <p:pic>
+        <p:nvPicPr>
+          <p:cNvPr id="5" name="Picture 4" descr="i5_dtam_factorial.png"/>
+          <p:cNvPicPr>
+            <a:picLocks noChangeAspect="1"/>
+          </p:cNvPicPr>
+          <p:nvPr/>
+        </p:nvPicPr>
+        <p:blipFill>
+          <a:blip r:embed="rId2"/>
+          <a:stretch>
+            <a:fillRect/>
+          </a:stretch>
+        </p:blipFill>
+        <p:spPr>
+          <a:xfrm>
+            <a:off x="658368" y="1783080"/>
+            <a:ext cx="5872477" cy="2217160"/>
+          </a:xfrm>
+          <a:prstGeom prst="rect">
+            <a:avLst/>
+          </a:prstGeom>
+        </p:spPr>
+      </p:pic>
+      <p:sp>
+        <p:nvSpPr>
+          <p:cNvPr id="6" name="Rounded Rectangle 5"/>
           <p:cNvSpPr/>
           <p:nvPr/>
         </p:nvSpPr>
         <p:spPr>
           <a:xfrm>
-            <a:off x="658368" y="1938527"/>
+            <a:off x="6965844" y="1847088"/>
             <a:ext cx="50292" cy="173736"/>
           </a:xfrm>
           <a:prstGeom prst="roundRect">
@@ -12956,14 +14203,14 @@
       </p:sp>
       <p:sp>
         <p:nvSpPr>
-          <p:cNvPr id="6" name="TextBox 5"/>
-          <p:cNvSpPr txBox="1"/>
-          <p:nvPr/>
-        </p:nvSpPr>
-        <p:spPr>
-          <a:xfrm>
-            <a:off x="841248" y="1874519"/>
-            <a:ext cx="10692079" cy="896112"/>
+          <p:cNvPr id="7" name="TextBox 6"/>
+          <p:cNvSpPr txBox="1"/>
+          <p:nvPr/>
+        </p:nvSpPr>
+        <p:spPr>
+          <a:xfrm>
+            <a:off x="7148724" y="1783080"/>
+            <a:ext cx="4384602" cy="1234440"/>
           </a:xfrm>
           <a:prstGeom prst="rect">
             <a:avLst/>
@@ -12985,35 +14232,35 @@
               </a:spcAft>
             </a:pPr>
             <a:r>
-              <a:rPr sz="1200" b="1">
+              <a:rPr sz="1150" b="1">
                 <a:solidFill>
                   <a:srgbClr val="0B3D5C"/>
                 </a:solidFill>
                 <a:latin typeface="Calibri"/>
               </a:rPr>
-              <a:t>1. A specific policy design.  </a:t>
-            </a:r>
-            <a:r>
-              <a:rPr sz="1200" b="0">
+              <a:t>Heterogeneous island parameters help.  </a:t>
+            </a:r>
+            <a:r>
+              <a:rPr sz="1150" b="0">
                 <a:solidFill>
                   <a:srgbClr val="51697A"/>
                 </a:solidFill>
                 <a:latin typeface="Calibri"/>
               </a:rPr>
-              <a:t>The combination of a stagnation trigger with distant-source pull selection chosen at runtime is self-implemented. Incremental, and presented as such.</a:t>
-            </a:r>
-          </a:p>
-        </p:txBody>
-      </p:sp>
-      <p:sp>
-        <p:nvSpPr>
-          <p:cNvPr id="7" name="Rounded Rectangle 6"/>
+              <a:t>The only mechanism that consistently improves on stock DTAM (-2.8% uniform, -4.9% clustered); triples donor availability, but does not close the gap to fixed migration.</a:t>
+            </a:r>
+          </a:p>
+        </p:txBody>
+      </p:sp>
+      <p:sp>
+        <p:nvSpPr>
+          <p:cNvPr id="8" name="Rounded Rectangle 7"/>
           <p:cNvSpPr/>
           <p:nvPr/>
         </p:nvSpPr>
         <p:spPr>
           <a:xfrm>
-            <a:off x="658368" y="2834639"/>
+            <a:off x="6965844" y="3081528"/>
             <a:ext cx="50292" cy="173736"/>
           </a:xfrm>
           <a:prstGeom prst="roundRect">
@@ -13053,14 +14300,14 @@
       </p:sp>
       <p:sp>
         <p:nvSpPr>
-          <p:cNvPr id="8" name="TextBox 7"/>
-          <p:cNvSpPr txBox="1"/>
-          <p:nvPr/>
-        </p:nvSpPr>
-        <p:spPr>
-          <a:xfrm>
-            <a:off x="841248" y="2770631"/>
-            <a:ext cx="10692079" cy="896112"/>
+          <p:cNvPr id="9" name="TextBox 8"/>
+          <p:cNvSpPr txBox="1"/>
+          <p:nvPr/>
+        </p:nvSpPr>
+        <p:spPr>
+          <a:xfrm>
+            <a:off x="7148724" y="3017520"/>
+            <a:ext cx="4384602" cy="1234440"/>
           </a:xfrm>
           <a:prstGeom prst="rect">
             <a:avLst/>
@@ -13082,230 +14329,36 @@
               </a:spcAft>
             </a:pPr>
             <a:r>
-              <a:rPr sz="1200" b="1">
+              <a:rPr sz="1150" b="1">
                 <a:solidFill>
                   <a:srgbClr val="0B3D5C"/>
                 </a:solidFill>
                 <a:latin typeface="Calibri"/>
               </a:rPr>
-              <a:t>2. An HPC-framed evaluation that changed the answer.  </a:t>
-            </a:r>
-            <a:r>
-              <a:rPr sz="1200" b="0">
+              <a:t>The relative trigger works exactly as designed - and that makes it worse.  </a:t>
+            </a:r>
+            <a:r>
+              <a:rPr sz="1150" b="0">
                 <a:solidFill>
                   <a:srgbClr val="51697A"/>
                 </a:solidFill>
                 <a:latin typeface="Calibri"/>
               </a:rPr>
-              <a:t>Reporting speedup, efficiency, Karp-Flatt and Amdahl alongside quality exposed two Review-1 headline numbers as measurement artefacts and located the real bottleneck.</a:t>
-            </a:r>
-          </a:p>
-        </p:txBody>
-      </p:sp>
-      <p:sp>
-        <p:nvSpPr>
-          <p:cNvPr id="9" name="Rounded Rectangle 8"/>
+              <a:t>Discrimination is restored (99.8% -&gt; ~31% firing, donor availability -&gt; 100%), and quality drops 18-20%, because migration is the dominant source of genetic material once islands collapse.</a:t>
+            </a:r>
+          </a:p>
+        </p:txBody>
+      </p:sp>
+      <p:sp>
+        <p:nvSpPr>
+          <p:cNvPr id="10" name="Rounded Rectangle 9"/>
           <p:cNvSpPr/>
           <p:nvPr/>
         </p:nvSpPr>
         <p:spPr>
           <a:xfrm>
-            <a:off x="658368" y="3730751"/>
-            <a:ext cx="50292" cy="173736"/>
-          </a:xfrm>
-          <a:prstGeom prst="roundRect">
-            <a:avLst>
-              <a:gd name="adj" fmla="val 4500"/>
-            </a:avLst>
-          </a:prstGeom>
-          <a:solidFill>
-            <a:srgbClr val="F2A541"/>
-          </a:solidFill>
-          <a:ln>
-            <a:noFill/>
-          </a:ln>
-          <a:effectLst/>
-        </p:spPr>
-        <p:style>
-          <a:lnRef idx="1">
-            <a:schemeClr val="accent1"/>
-          </a:lnRef>
-          <a:fillRef idx="3">
-            <a:schemeClr val="accent1"/>
-          </a:fillRef>
-          <a:effectRef idx="2">
-            <a:schemeClr val="accent1"/>
-          </a:effectRef>
-          <a:fontRef idx="minor">
-            <a:schemeClr val="lt1"/>
-          </a:fontRef>
-        </p:style>
-        <p:txBody>
-          <a:bodyPr rtlCol="0" anchor="ctr"/>
-          <a:lstStyle/>
-          <a:p>
-            <a:pPr algn="ctr"/>
-          </a:p>
-        </p:txBody>
-      </p:sp>
-      <p:sp>
-        <p:nvSpPr>
-          <p:cNvPr id="10" name="TextBox 9"/>
-          <p:cNvSpPr txBox="1"/>
-          <p:nvPr/>
-        </p:nvSpPr>
-        <p:spPr>
-          <a:xfrm>
-            <a:off x="841248" y="3666743"/>
-            <a:ext cx="10692079" cy="896112"/>
-          </a:xfrm>
-          <a:prstGeom prst="rect">
-            <a:avLst/>
-          </a:prstGeom>
-          <a:noFill/>
-        </p:spPr>
-        <p:txBody>
-          <a:bodyPr wrap="square" anchor="t" lIns="0" rIns="0" tIns="0" bIns="0">
-            <a:spAutoFit/>
-          </a:bodyPr>
-          <a:lstStyle/>
-          <a:p>
-            <a:pPr algn="l">
-              <a:lnSpc>
-                <a:spcPct val="122000"/>
-              </a:lnSpc>
-              <a:spcAft>
-                <a:spcPts val="0"/>
-              </a:spcAft>
-            </a:pPr>
-            <a:r>
-              <a:rPr sz="1200" b="1">
-                <a:solidFill>
-                  <a:srgbClr val="0B3D5C"/>
-                </a:solidFill>
-                <a:latin typeface="Calibri"/>
-              </a:rPr>
-              <a:t>3. A cost-versus-quality framing the literature does not contain.  </a:t>
-            </a:r>
-            <a:r>
-              <a:rPr sz="1200" b="0">
-                <a:solidFill>
-                  <a:srgbClr val="51697A"/>
-                </a:solidFill>
-                <a:latin typeface="Calibri"/>
-              </a:rPr>
-              <a:t>No surveyed adaptive-migration paper measures the runtime cost of an adaptive migration decision. “8.6% better per generation, 8.4% worse per second” is exactly the trade-off that framing hides.</a:t>
-            </a:r>
-          </a:p>
-        </p:txBody>
-      </p:sp>
-      <p:sp>
-        <p:nvSpPr>
-          <p:cNvPr id="11" name="Rounded Rectangle 10"/>
-          <p:cNvSpPr/>
-          <p:nvPr/>
-        </p:nvSpPr>
-        <p:spPr>
-          <a:xfrm>
-            <a:off x="658368" y="4626863"/>
-            <a:ext cx="50292" cy="173736"/>
-          </a:xfrm>
-          <a:prstGeom prst="roundRect">
-            <a:avLst>
-              <a:gd name="adj" fmla="val 4500"/>
-            </a:avLst>
-          </a:prstGeom>
-          <a:solidFill>
-            <a:srgbClr val="F2A541"/>
-          </a:solidFill>
-          <a:ln>
-            <a:noFill/>
-          </a:ln>
-          <a:effectLst/>
-        </p:spPr>
-        <p:style>
-          <a:lnRef idx="1">
-            <a:schemeClr val="accent1"/>
-          </a:lnRef>
-          <a:fillRef idx="3">
-            <a:schemeClr val="accent1"/>
-          </a:fillRef>
-          <a:effectRef idx="2">
-            <a:schemeClr val="accent1"/>
-          </a:effectRef>
-          <a:fontRef idx="minor">
-            <a:schemeClr val="lt1"/>
-          </a:fontRef>
-        </p:style>
-        <p:txBody>
-          <a:bodyPr rtlCol="0" anchor="ctr"/>
-          <a:lstStyle/>
-          <a:p>
-            <a:pPr algn="ctr"/>
-          </a:p>
-        </p:txBody>
-      </p:sp>
-      <p:sp>
-        <p:nvSpPr>
-          <p:cNvPr id="12" name="TextBox 11"/>
-          <p:cNvSpPr txBox="1"/>
-          <p:nvPr/>
-        </p:nvSpPr>
-        <p:spPr>
-          <a:xfrm>
-            <a:off x="841248" y="4562855"/>
-            <a:ext cx="10692079" cy="896112"/>
-          </a:xfrm>
-          <a:prstGeom prst="rect">
-            <a:avLst/>
-          </a:prstGeom>
-          <a:noFill/>
-        </p:spPr>
-        <p:txBody>
-          <a:bodyPr wrap="square" anchor="t" lIns="0" rIns="0" tIns="0" bIns="0">
-            <a:spAutoFit/>
-          </a:bodyPr>
-          <a:lstStyle/>
-          <a:p>
-            <a:pPr algn="l">
-              <a:lnSpc>
-                <a:spcPct val="122000"/>
-              </a:lnSpc>
-              <a:spcAft>
-                <a:spcPts val="0"/>
-              </a:spcAft>
-            </a:pPr>
-            <a:r>
-              <a:rPr sz="1200" b="1">
-                <a:solidFill>
-                  <a:srgbClr val="0B3D5C"/>
-                </a:solidFill>
-                <a:latin typeface="Calibri"/>
-              </a:rPr>
-              <a:t>4. A mechanistically diagnosed negative result.  </a:t>
-            </a:r>
-            <a:r>
-              <a:rPr sz="1200" b="0">
-                <a:solidFill>
-                  <a:srgbClr val="51697A"/>
-                </a:solidFill>
-                <a:latin typeface="Calibri"/>
-              </a:rPr>
-              <a:t>Donor-availability instrumentation shows the proposed mechanism fires as designed on under 1% of migrations - a more useful finding than a null result, because it identifies why.</a:t>
-            </a:r>
-          </a:p>
-        </p:txBody>
-      </p:sp>
-      <p:sp>
-        <p:nvSpPr>
-          <p:cNvPr id="13" name="Rounded Rectangle 12"/>
-          <p:cNvSpPr/>
-          <p:nvPr/>
-        </p:nvSpPr>
-        <p:spPr>
-          <a:xfrm>
-            <a:off x="658368" y="5806440"/>
-            <a:ext cx="10874959" cy="713232"/>
+            <a:off x="658368" y="5394960"/>
+            <a:ext cx="10874959" cy="868680"/>
           </a:xfrm>
           <a:prstGeom prst="roundRect">
             <a:avLst>
@@ -13346,14 +14399,14 @@
       </p:sp>
       <p:sp>
         <p:nvSpPr>
-          <p:cNvPr id="14" name="Rounded Rectangle 13"/>
+          <p:cNvPr id="11" name="Rounded Rectangle 10"/>
           <p:cNvSpPr/>
           <p:nvPr/>
         </p:nvSpPr>
         <p:spPr>
           <a:xfrm>
-            <a:off x="658368" y="5806440"/>
-            <a:ext cx="50292" cy="713232"/>
+            <a:off x="658368" y="5394960"/>
+            <a:ext cx="50292" cy="868680"/>
           </a:xfrm>
           <a:prstGeom prst="roundRect">
             <a:avLst>
@@ -13392,13 +14445,13 @@
       </p:sp>
       <p:sp>
         <p:nvSpPr>
-          <p:cNvPr id="15" name="TextBox 14"/>
-          <p:cNvSpPr txBox="1"/>
-          <p:nvPr/>
-        </p:nvSpPr>
-        <p:spPr>
-          <a:xfrm>
-            <a:off x="877824" y="5952744"/>
+          <p:cNvPr id="12" name="TextBox 11"/>
+          <p:cNvSpPr txBox="1"/>
+          <p:nvPr/>
+        </p:nvSpPr>
+        <p:spPr>
+          <a:xfrm>
+            <a:off x="877824" y="5541264"/>
             <a:ext cx="10454335" cy="274320"/>
           </a:xfrm>
           <a:prstGeom prst="rect">
@@ -13427,21 +14480,21 @@
                 </a:solidFill>
                 <a:latin typeface="Calibri"/>
               </a:rPr>
-              <a:t>What this does not claim.</a:t>
-            </a:r>
-          </a:p>
-        </p:txBody>
-      </p:sp>
-      <p:sp>
-        <p:nvSpPr>
-          <p:cNvPr id="16" name="TextBox 15"/>
-          <p:cNvSpPr txBox="1"/>
-          <p:nvPr/>
-        </p:nvSpPr>
-        <p:spPr>
-          <a:xfrm>
-            <a:off x="877824" y="6263640"/>
-            <a:ext cx="10454335" cy="146304"/>
+              <a:t>DTAM's core premise is wrong for this problem.</a:t>
+            </a:r>
+          </a:p>
+        </p:txBody>
+      </p:sp>
+      <p:sp>
+        <p:nvSpPr>
+          <p:cNvPr id="13" name="TextBox 12"/>
+          <p:cNvSpPr txBox="1"/>
+          <p:nvPr/>
+        </p:nvSpPr>
+        <p:spPr>
+          <a:xfrm>
+            <a:off x="877824" y="5852160"/>
+            <a:ext cx="10454335" cy="301752"/>
           </a:xfrm>
           <a:prstGeom prst="rect">
             <a:avLst/>
@@ -13469,7 +14522,7 @@
                 </a:solidFill>
                 <a:latin typeface="Calibri"/>
               </a:rPr>
-              <a:t>No configuration was found in which DTAM meaningfully beats fixed migration.</a:t>
+              <a:t>The right policy here is to migrate constantly, demonstrated mechanistically rather than asserted.</a:t>
             </a:r>
           </a:p>
         </p:txBody>
@@ -13537,7 +14590,7 @@
                 </a:solidFill>
                 <a:latin typeface="Calibri"/>
               </a:rPr>
-              <a:t>CONCLUSION</a:t>
+              <a:t>NOVELTY</a:t>
             </a:r>
           </a:p>
         </p:txBody>
@@ -13579,7 +14632,7 @@
                 </a:solidFill>
                 <a:latin typeface="Cambria"/>
               </a:rPr>
-              <a:t>Conclusion and future work</a:t>
+              <a:t>Novelty, honestly stated</a:t>
             </a:r>
           </a:p>
         </p:txBody>
@@ -13681,7 +14734,7 @@
         <p:spPr>
           <a:xfrm>
             <a:off x="841248" y="1874519"/>
-            <a:ext cx="10692079" cy="1371600"/>
+            <a:ext cx="10692079" cy="896112"/>
           </a:xfrm>
           <a:prstGeom prst="rect">
             <a:avLst/>
@@ -13703,22 +14756,22 @@
               </a:spcAft>
             </a:pPr>
             <a:r>
-              <a:rPr sz="1300" b="1">
+              <a:rPr sz="1200" b="1">
                 <a:solidFill>
                   <a:srgbClr val="0B3D5C"/>
                 </a:solidFill>
                 <a:latin typeface="Calibri"/>
               </a:rPr>
-              <a:t>Conclusion.  </a:t>
-            </a:r>
-            <a:r>
-              <a:rPr sz="1300" b="0">
+              <a:t>1. A specific policy design.  </a:t>
+            </a:r>
+            <a:r>
+              <a:rPr sz="1200" b="0">
                 <a:solidFill>
                   <a:srgbClr val="51697A"/>
                 </a:solidFill>
                 <a:latin typeface="Calibri"/>
               </a:rPr>
-              <a:t>On the stated target hardware, the shared GA core scales to 3.93x at 8 SMT threads once measurement flaws are removed; candidate-list 2-opt is the largest engineering gain and solves all seven TSPLIB instances to proven optimum; DTAM does not beat fixed migration, and the reason - donor availability under 1% - is now demonstrated rather than guessed at.</a:t>
+              <a:t>The combination of a stagnation trigger with distant-source pull selection chosen at runtime is self-implemented. Incremental, and presented as such.</a:t>
             </a:r>
           </a:p>
         </p:txBody>
@@ -13731,7 +14784,7 @@
         </p:nvSpPr>
         <p:spPr>
           <a:xfrm>
-            <a:off x="658368" y="3310127"/>
+            <a:off x="658368" y="2834639"/>
             <a:ext cx="50292" cy="173736"/>
           </a:xfrm>
           <a:prstGeom prst="roundRect">
@@ -13777,8 +14830,8 @@
         </p:nvSpPr>
         <p:spPr>
           <a:xfrm>
-            <a:off x="841248" y="3246119"/>
-            <a:ext cx="10692079" cy="1371600"/>
+            <a:off x="841248" y="2770631"/>
+            <a:ext cx="10692079" cy="896112"/>
           </a:xfrm>
           <a:prstGeom prst="rect">
             <a:avLst/>
@@ -13800,22 +14853,22 @@
               </a:spcAft>
             </a:pPr>
             <a:r>
-              <a:rPr sz="1300" b="1">
+              <a:rPr sz="1200" b="1">
                 <a:solidFill>
                   <a:srgbClr val="0B3D5C"/>
                 </a:solidFill>
                 <a:latin typeface="Calibri"/>
               </a:rPr>
-              <a:t>Future work.  </a:t>
-            </a:r>
-            <a:r>
-              <a:rPr sz="1300" b="0">
+              <a:t>2. An HPC-framed evaluation that changed the answer.  </a:t>
+            </a:r>
+            <a:r>
+              <a:rPr sz="1200" b="0">
                 <a:solidFill>
                   <a:srgbClr val="51697A"/>
                 </a:solidFill>
                 <a:latin typeface="Calibri"/>
               </a:rPr>
-              <a:t>Test heterogeneous island parameters at other spreads. Sweep tau on more than one instance family. Increase E1 seed count for the equal-work DTAM comparison beyond 3 pairs. Extend beyond Euclidean TSP and beyond one GA operator set to see whether the migrate-constantly finding generalises.</a:t>
+              <a:t>Reporting speedup, efficiency, Karp-Flatt and Amdahl alongside quality exposed two Review-1 headline numbers as measurement artefacts and located the real bottleneck.</a:t>
             </a:r>
           </a:p>
         </p:txBody>
@@ -13828,8 +14881,202 @@
         </p:nvSpPr>
         <p:spPr>
           <a:xfrm>
-            <a:off x="658368" y="5486400"/>
-            <a:ext cx="10874959" cy="1051560"/>
+            <a:off x="658368" y="3730751"/>
+            <a:ext cx="50292" cy="173736"/>
+          </a:xfrm>
+          <a:prstGeom prst="roundRect">
+            <a:avLst>
+              <a:gd name="adj" fmla="val 4500"/>
+            </a:avLst>
+          </a:prstGeom>
+          <a:solidFill>
+            <a:srgbClr val="F2A541"/>
+          </a:solidFill>
+          <a:ln>
+            <a:noFill/>
+          </a:ln>
+          <a:effectLst/>
+        </p:spPr>
+        <p:style>
+          <a:lnRef idx="1">
+            <a:schemeClr val="accent1"/>
+          </a:lnRef>
+          <a:fillRef idx="3">
+            <a:schemeClr val="accent1"/>
+          </a:fillRef>
+          <a:effectRef idx="2">
+            <a:schemeClr val="accent1"/>
+          </a:effectRef>
+          <a:fontRef idx="minor">
+            <a:schemeClr val="lt1"/>
+          </a:fontRef>
+        </p:style>
+        <p:txBody>
+          <a:bodyPr rtlCol="0" anchor="ctr"/>
+          <a:lstStyle/>
+          <a:p>
+            <a:pPr algn="ctr"/>
+          </a:p>
+        </p:txBody>
+      </p:sp>
+      <p:sp>
+        <p:nvSpPr>
+          <p:cNvPr id="10" name="TextBox 9"/>
+          <p:cNvSpPr txBox="1"/>
+          <p:nvPr/>
+        </p:nvSpPr>
+        <p:spPr>
+          <a:xfrm>
+            <a:off x="841248" y="3666743"/>
+            <a:ext cx="10692079" cy="896112"/>
+          </a:xfrm>
+          <a:prstGeom prst="rect">
+            <a:avLst/>
+          </a:prstGeom>
+          <a:noFill/>
+        </p:spPr>
+        <p:txBody>
+          <a:bodyPr wrap="square" anchor="t" lIns="0" rIns="0" tIns="0" bIns="0">
+            <a:spAutoFit/>
+          </a:bodyPr>
+          <a:lstStyle/>
+          <a:p>
+            <a:pPr algn="l">
+              <a:lnSpc>
+                <a:spcPct val="122000"/>
+              </a:lnSpc>
+              <a:spcAft>
+                <a:spcPts val="0"/>
+              </a:spcAft>
+            </a:pPr>
+            <a:r>
+              <a:rPr sz="1200" b="1">
+                <a:solidFill>
+                  <a:srgbClr val="0B3D5C"/>
+                </a:solidFill>
+                <a:latin typeface="Calibri"/>
+              </a:rPr>
+              <a:t>3. A cost-versus-quality framing the literature does not contain.  </a:t>
+            </a:r>
+            <a:r>
+              <a:rPr sz="1200" b="0">
+                <a:solidFill>
+                  <a:srgbClr val="51697A"/>
+                </a:solidFill>
+                <a:latin typeface="Calibri"/>
+              </a:rPr>
+              <a:t>No surveyed adaptive-migration paper measures the runtime cost of an adaptive migration decision. “8.6% better per generation, 8.4% worse per second” is exactly the trade-off that framing hides.</a:t>
+            </a:r>
+          </a:p>
+        </p:txBody>
+      </p:sp>
+      <p:sp>
+        <p:nvSpPr>
+          <p:cNvPr id="11" name="Rounded Rectangle 10"/>
+          <p:cNvSpPr/>
+          <p:nvPr/>
+        </p:nvSpPr>
+        <p:spPr>
+          <a:xfrm>
+            <a:off x="658368" y="4626863"/>
+            <a:ext cx="50292" cy="173736"/>
+          </a:xfrm>
+          <a:prstGeom prst="roundRect">
+            <a:avLst>
+              <a:gd name="adj" fmla="val 4500"/>
+            </a:avLst>
+          </a:prstGeom>
+          <a:solidFill>
+            <a:srgbClr val="F2A541"/>
+          </a:solidFill>
+          <a:ln>
+            <a:noFill/>
+          </a:ln>
+          <a:effectLst/>
+        </p:spPr>
+        <p:style>
+          <a:lnRef idx="1">
+            <a:schemeClr val="accent1"/>
+          </a:lnRef>
+          <a:fillRef idx="3">
+            <a:schemeClr val="accent1"/>
+          </a:fillRef>
+          <a:effectRef idx="2">
+            <a:schemeClr val="accent1"/>
+          </a:effectRef>
+          <a:fontRef idx="minor">
+            <a:schemeClr val="lt1"/>
+          </a:fontRef>
+        </p:style>
+        <p:txBody>
+          <a:bodyPr rtlCol="0" anchor="ctr"/>
+          <a:lstStyle/>
+          <a:p>
+            <a:pPr algn="ctr"/>
+          </a:p>
+        </p:txBody>
+      </p:sp>
+      <p:sp>
+        <p:nvSpPr>
+          <p:cNvPr id="12" name="TextBox 11"/>
+          <p:cNvSpPr txBox="1"/>
+          <p:nvPr/>
+        </p:nvSpPr>
+        <p:spPr>
+          <a:xfrm>
+            <a:off x="841248" y="4562855"/>
+            <a:ext cx="10692079" cy="896112"/>
+          </a:xfrm>
+          <a:prstGeom prst="rect">
+            <a:avLst/>
+          </a:prstGeom>
+          <a:noFill/>
+        </p:spPr>
+        <p:txBody>
+          <a:bodyPr wrap="square" anchor="t" lIns="0" rIns="0" tIns="0" bIns="0">
+            <a:spAutoFit/>
+          </a:bodyPr>
+          <a:lstStyle/>
+          <a:p>
+            <a:pPr algn="l">
+              <a:lnSpc>
+                <a:spcPct val="122000"/>
+              </a:lnSpc>
+              <a:spcAft>
+                <a:spcPts val="0"/>
+              </a:spcAft>
+            </a:pPr>
+            <a:r>
+              <a:rPr sz="1200" b="1">
+                <a:solidFill>
+                  <a:srgbClr val="0B3D5C"/>
+                </a:solidFill>
+                <a:latin typeface="Calibri"/>
+              </a:rPr>
+              <a:t>4. A mechanistically diagnosed negative result.  </a:t>
+            </a:r>
+            <a:r>
+              <a:rPr sz="1200" b="0">
+                <a:solidFill>
+                  <a:srgbClr val="51697A"/>
+                </a:solidFill>
+                <a:latin typeface="Calibri"/>
+              </a:rPr>
+              <a:t>Donor-availability instrumentation shows the proposed mechanism fires as designed on under 1% of migrations - a more useful finding than a null result, because it identifies why.</a:t>
+            </a:r>
+          </a:p>
+        </p:txBody>
+      </p:sp>
+      <p:sp>
+        <p:nvSpPr>
+          <p:cNvPr id="13" name="Rounded Rectangle 12"/>
+          <p:cNvSpPr/>
+          <p:nvPr/>
+        </p:nvSpPr>
+        <p:spPr>
+          <a:xfrm>
+            <a:off x="658368" y="5806440"/>
+            <a:ext cx="10874959" cy="713232"/>
           </a:xfrm>
           <a:prstGeom prst="roundRect">
             <a:avLst>
@@ -13870,14 +15117,14 @@
       </p:sp>
       <p:sp>
         <p:nvSpPr>
-          <p:cNvPr id="10" name="Rounded Rectangle 9"/>
+          <p:cNvPr id="14" name="Rounded Rectangle 13"/>
           <p:cNvSpPr/>
           <p:nvPr/>
         </p:nvSpPr>
         <p:spPr>
           <a:xfrm>
-            <a:off x="658368" y="5486400"/>
-            <a:ext cx="50292" cy="1051560"/>
+            <a:off x="658368" y="5806440"/>
+            <a:ext cx="50292" cy="713232"/>
           </a:xfrm>
           <a:prstGeom prst="roundRect">
             <a:avLst>
@@ -13916,13 +15163,13 @@
       </p:sp>
       <p:sp>
         <p:nvSpPr>
-          <p:cNvPr id="11" name="TextBox 10"/>
-          <p:cNvSpPr txBox="1"/>
-          <p:nvPr/>
-        </p:nvSpPr>
-        <p:spPr>
-          <a:xfrm>
-            <a:off x="877824" y="5632704"/>
+          <p:cNvPr id="15" name="TextBox 14"/>
+          <p:cNvSpPr txBox="1"/>
+          <p:nvPr/>
+        </p:nvSpPr>
+        <p:spPr>
+          <a:xfrm>
+            <a:off x="877824" y="5952744"/>
             <a:ext cx="10454335" cy="274320"/>
           </a:xfrm>
           <a:prstGeom prst="rect">
@@ -13951,21 +15198,21 @@
                 </a:solidFill>
                 <a:latin typeface="Calibri"/>
               </a:rPr>
-              <a:t>Known limitations, stated plainly.</a:t>
-            </a:r>
-          </a:p>
-        </p:txBody>
-      </p:sp>
-      <p:sp>
-        <p:nvSpPr>
-          <p:cNvPr id="12" name="TextBox 11"/>
-          <p:cNvSpPr txBox="1"/>
-          <p:nvPr/>
-        </p:nvSpPr>
-        <p:spPr>
-          <a:xfrm>
-            <a:off x="877824" y="5943600"/>
-            <a:ext cx="10454335" cy="484632"/>
+              <a:t>What this does not claim.</a:t>
+            </a:r>
+          </a:p>
+        </p:txBody>
+      </p:sp>
+      <p:sp>
+        <p:nvSpPr>
+          <p:cNvPr id="16" name="TextBox 15"/>
+          <p:cNvSpPr txBox="1"/>
+          <p:nvPr/>
+        </p:nvSpPr>
+        <p:spPr>
+          <a:xfrm>
+            <a:off x="877824" y="6263640"/>
+            <a:ext cx="10454335" cy="146304"/>
           </a:xfrm>
           <a:prstGeom prst="rect">
             <a:avLst/>
@@ -13993,7 +15240,7 @@
                 </a:solidFill>
                 <a:latin typeface="Calibri"/>
               </a:rPr>
-              <a:t>Euclidean TSP only, one machine, one GA operator set. Results at 6 and 8 threads use SMT, where efficiency past 4 physical cores is expected to fall.</a:t>
+              <a:t>No configuration was found in which DTAM meaningfully beats fixed migration.</a:t>
             </a:r>
           </a:p>
         </p:txBody>
@@ -14615,6 +15862,530 @@
                 <a:latin typeface="Calibri"/>
               </a:rPr>
               <a:t>Every number that follows was measured on the i5, is reproducible from results/FINDINGS.md, and is never re-rounded or extrapolated.</a:t>
+            </a:r>
+          </a:p>
+        </p:txBody>
+      </p:sp>
+    </p:spTree>
+  </p:cSld>
+  <p:clrMapOvr>
+    <a:masterClrMapping/>
+  </p:clrMapOvr>
+</p:sld>
+</file>
+
+<file path=ppt/slides/slide20.xml><?xml version="1.0" encoding="utf-8"?>
+<p:sld xmlns:a="http://schemas.openxmlformats.org/drawingml/2006/main" xmlns:p="http://schemas.openxmlformats.org/presentationml/2006/main" xmlns:r="http://schemas.openxmlformats.org/officeDocument/2006/relationships">
+  <p:cSld>
+    <p:bg>
+      <p:bgPr>
+        <a:solidFill>
+          <a:srgbClr val="F7F9FA"/>
+        </a:solidFill>
+        <a:effectLst/>
+      </p:bgPr>
+    </p:bg>
+    <p:spTree>
+      <p:nvGrpSpPr>
+        <p:cNvPr id="1" name=""/>
+        <p:cNvGrpSpPr/>
+        <p:nvPr/>
+      </p:nvGrpSpPr>
+      <p:grpSpPr/>
+      <p:sp>
+        <p:nvSpPr>
+          <p:cNvPr id="2" name="TextBox 1"/>
+          <p:cNvSpPr txBox="1"/>
+          <p:nvPr/>
+        </p:nvSpPr>
+        <p:spPr>
+          <a:xfrm>
+            <a:off x="658368" y="420624"/>
+            <a:ext cx="7315200" cy="256032"/>
+          </a:xfrm>
+          <a:prstGeom prst="rect">
+            <a:avLst/>
+          </a:prstGeom>
+          <a:noFill/>
+        </p:spPr>
+        <p:txBody>
+          <a:bodyPr wrap="square" anchor="t" lIns="0" rIns="0" tIns="0" bIns="0">
+            <a:spAutoFit/>
+          </a:bodyPr>
+          <a:lstStyle/>
+          <a:p>
+            <a:pPr algn="l">
+              <a:lnSpc>
+                <a:spcPct val="100000"/>
+              </a:lnSpc>
+              <a:spcAft>
+                <a:spcPts val="0"/>
+              </a:spcAft>
+            </a:pPr>
+            <a:r>
+              <a:rPr sz="1250" b="1">
+                <a:solidFill>
+                  <a:srgbClr val="1C7293"/>
+                </a:solidFill>
+                <a:latin typeface="Calibri"/>
+              </a:rPr>
+              <a:t>CONCLUSION</a:t>
+            </a:r>
+          </a:p>
+        </p:txBody>
+      </p:sp>
+      <p:sp>
+        <p:nvSpPr>
+          <p:cNvPr id="3" name="TextBox 2"/>
+          <p:cNvSpPr txBox="1"/>
+          <p:nvPr/>
+        </p:nvSpPr>
+        <p:spPr>
+          <a:xfrm>
+            <a:off x="658368" y="713232"/>
+            <a:ext cx="10874959" cy="658368"/>
+          </a:xfrm>
+          <a:prstGeom prst="rect">
+            <a:avLst/>
+          </a:prstGeom>
+          <a:noFill/>
+        </p:spPr>
+        <p:txBody>
+          <a:bodyPr wrap="square" anchor="t" lIns="0" rIns="0" tIns="0" bIns="0">
+            <a:spAutoFit/>
+          </a:bodyPr>
+          <a:lstStyle/>
+          <a:p>
+            <a:pPr algn="l">
+              <a:lnSpc>
+                <a:spcPct val="100000"/>
+              </a:lnSpc>
+              <a:spcAft>
+                <a:spcPts val="0"/>
+              </a:spcAft>
+            </a:pPr>
+            <a:r>
+              <a:rPr sz="2900" b="1">
+                <a:solidFill>
+                  <a:srgbClr val="0B3D5C"/>
+                </a:solidFill>
+                <a:latin typeface="Cambria"/>
+              </a:rPr>
+              <a:t>Conclusion and future work</a:t>
+            </a:r>
+          </a:p>
+        </p:txBody>
+      </p:sp>
+      <p:sp>
+        <p:nvSpPr>
+          <p:cNvPr id="4" name="TextBox 3"/>
+          <p:cNvSpPr txBox="1"/>
+          <p:nvPr/>
+        </p:nvSpPr>
+        <p:spPr>
+          <a:xfrm>
+            <a:off x="10984687" y="6400800"/>
+            <a:ext cx="548640" cy="228600"/>
+          </a:xfrm>
+          <a:prstGeom prst="rect">
+            <a:avLst/>
+          </a:prstGeom>
+          <a:noFill/>
+        </p:spPr>
+        <p:txBody>
+          <a:bodyPr wrap="square" anchor="t" lIns="0" rIns="0" tIns="0" bIns="0">
+            <a:spAutoFit/>
+          </a:bodyPr>
+          <a:lstStyle/>
+          <a:p>
+            <a:pPr algn="r">
+              <a:lnSpc>
+                <a:spcPct val="100000"/>
+              </a:lnSpc>
+              <a:spcAft>
+                <a:spcPts val="0"/>
+              </a:spcAft>
+            </a:pPr>
+            <a:r>
+              <a:rPr sz="1000" b="0">
+                <a:solidFill>
+                  <a:srgbClr val="AFC3D0"/>
+                </a:solidFill>
+                <a:latin typeface="Calibri"/>
+              </a:rPr>
+              <a:t>20</a:t>
+            </a:r>
+          </a:p>
+        </p:txBody>
+      </p:sp>
+      <p:sp>
+        <p:nvSpPr>
+          <p:cNvPr id="5" name="Rounded Rectangle 4"/>
+          <p:cNvSpPr/>
+          <p:nvPr/>
+        </p:nvSpPr>
+        <p:spPr>
+          <a:xfrm>
+            <a:off x="658368" y="1938527"/>
+            <a:ext cx="50292" cy="173736"/>
+          </a:xfrm>
+          <a:prstGeom prst="roundRect">
+            <a:avLst>
+              <a:gd name="adj" fmla="val 4500"/>
+            </a:avLst>
+          </a:prstGeom>
+          <a:solidFill>
+            <a:srgbClr val="F2A541"/>
+          </a:solidFill>
+          <a:ln>
+            <a:noFill/>
+          </a:ln>
+          <a:effectLst/>
+        </p:spPr>
+        <p:style>
+          <a:lnRef idx="1">
+            <a:schemeClr val="accent1"/>
+          </a:lnRef>
+          <a:fillRef idx="3">
+            <a:schemeClr val="accent1"/>
+          </a:fillRef>
+          <a:effectRef idx="2">
+            <a:schemeClr val="accent1"/>
+          </a:effectRef>
+          <a:fontRef idx="minor">
+            <a:schemeClr val="lt1"/>
+          </a:fontRef>
+        </p:style>
+        <p:txBody>
+          <a:bodyPr rtlCol="0" anchor="ctr"/>
+          <a:lstStyle/>
+          <a:p>
+            <a:pPr algn="ctr"/>
+          </a:p>
+        </p:txBody>
+      </p:sp>
+      <p:sp>
+        <p:nvSpPr>
+          <p:cNvPr id="6" name="TextBox 5"/>
+          <p:cNvSpPr txBox="1"/>
+          <p:nvPr/>
+        </p:nvSpPr>
+        <p:spPr>
+          <a:xfrm>
+            <a:off x="841248" y="1874519"/>
+            <a:ext cx="10692079" cy="1371600"/>
+          </a:xfrm>
+          <a:prstGeom prst="rect">
+            <a:avLst/>
+          </a:prstGeom>
+          <a:noFill/>
+        </p:spPr>
+        <p:txBody>
+          <a:bodyPr wrap="square" anchor="t" lIns="0" rIns="0" tIns="0" bIns="0">
+            <a:spAutoFit/>
+          </a:bodyPr>
+          <a:lstStyle/>
+          <a:p>
+            <a:pPr algn="l">
+              <a:lnSpc>
+                <a:spcPct val="122000"/>
+              </a:lnSpc>
+              <a:spcAft>
+                <a:spcPts val="0"/>
+              </a:spcAft>
+            </a:pPr>
+            <a:r>
+              <a:rPr sz="1300" b="1">
+                <a:solidFill>
+                  <a:srgbClr val="0B3D5C"/>
+                </a:solidFill>
+                <a:latin typeface="Calibri"/>
+              </a:rPr>
+              <a:t>Conclusion.  </a:t>
+            </a:r>
+            <a:r>
+              <a:rPr sz="1300" b="0">
+                <a:solidFill>
+                  <a:srgbClr val="51697A"/>
+                </a:solidFill>
+                <a:latin typeface="Calibri"/>
+              </a:rPr>
+              <a:t>On the stated target hardware, the shared GA core scales to 3.93x at 8 SMT threads once measurement flaws are removed; candidate-list 2-opt is the largest engineering gain and solves all seven TSPLIB instances to proven optimum; DTAM does not beat fixed migration, and the reason - donor availability under 1% - is now demonstrated rather than guessed at.</a:t>
+            </a:r>
+          </a:p>
+        </p:txBody>
+      </p:sp>
+      <p:sp>
+        <p:nvSpPr>
+          <p:cNvPr id="7" name="Rounded Rectangle 6"/>
+          <p:cNvSpPr/>
+          <p:nvPr/>
+        </p:nvSpPr>
+        <p:spPr>
+          <a:xfrm>
+            <a:off x="658368" y="3310127"/>
+            <a:ext cx="50292" cy="173736"/>
+          </a:xfrm>
+          <a:prstGeom prst="roundRect">
+            <a:avLst>
+              <a:gd name="adj" fmla="val 4500"/>
+            </a:avLst>
+          </a:prstGeom>
+          <a:solidFill>
+            <a:srgbClr val="F2A541"/>
+          </a:solidFill>
+          <a:ln>
+            <a:noFill/>
+          </a:ln>
+          <a:effectLst/>
+        </p:spPr>
+        <p:style>
+          <a:lnRef idx="1">
+            <a:schemeClr val="accent1"/>
+          </a:lnRef>
+          <a:fillRef idx="3">
+            <a:schemeClr val="accent1"/>
+          </a:fillRef>
+          <a:effectRef idx="2">
+            <a:schemeClr val="accent1"/>
+          </a:effectRef>
+          <a:fontRef idx="minor">
+            <a:schemeClr val="lt1"/>
+          </a:fontRef>
+        </p:style>
+        <p:txBody>
+          <a:bodyPr rtlCol="0" anchor="ctr"/>
+          <a:lstStyle/>
+          <a:p>
+            <a:pPr algn="ctr"/>
+          </a:p>
+        </p:txBody>
+      </p:sp>
+      <p:sp>
+        <p:nvSpPr>
+          <p:cNvPr id="8" name="TextBox 7"/>
+          <p:cNvSpPr txBox="1"/>
+          <p:nvPr/>
+        </p:nvSpPr>
+        <p:spPr>
+          <a:xfrm>
+            <a:off x="841248" y="3246119"/>
+            <a:ext cx="10692079" cy="1371600"/>
+          </a:xfrm>
+          <a:prstGeom prst="rect">
+            <a:avLst/>
+          </a:prstGeom>
+          <a:noFill/>
+        </p:spPr>
+        <p:txBody>
+          <a:bodyPr wrap="square" anchor="t" lIns="0" rIns="0" tIns="0" bIns="0">
+            <a:spAutoFit/>
+          </a:bodyPr>
+          <a:lstStyle/>
+          <a:p>
+            <a:pPr algn="l">
+              <a:lnSpc>
+                <a:spcPct val="122000"/>
+              </a:lnSpc>
+              <a:spcAft>
+                <a:spcPts val="0"/>
+              </a:spcAft>
+            </a:pPr>
+            <a:r>
+              <a:rPr sz="1300" b="1">
+                <a:solidFill>
+                  <a:srgbClr val="0B3D5C"/>
+                </a:solidFill>
+                <a:latin typeface="Calibri"/>
+              </a:rPr>
+              <a:t>Future work.  </a:t>
+            </a:r>
+            <a:r>
+              <a:rPr sz="1300" b="0">
+                <a:solidFill>
+                  <a:srgbClr val="51697A"/>
+                </a:solidFill>
+                <a:latin typeface="Calibri"/>
+              </a:rPr>
+              <a:t>Test heterogeneous island parameters at other spreads. Sweep tau on more than one instance family. Increase E1 seed count for the equal-work DTAM comparison beyond 3 pairs. Extend beyond Euclidean TSP and beyond one GA operator set to see whether the migrate-constantly finding generalises.</a:t>
+            </a:r>
+          </a:p>
+        </p:txBody>
+      </p:sp>
+      <p:sp>
+        <p:nvSpPr>
+          <p:cNvPr id="9" name="Rounded Rectangle 8"/>
+          <p:cNvSpPr/>
+          <p:nvPr/>
+        </p:nvSpPr>
+        <p:spPr>
+          <a:xfrm>
+            <a:off x="658368" y="5486400"/>
+            <a:ext cx="10874959" cy="1051560"/>
+          </a:xfrm>
+          <a:prstGeom prst="roundRect">
+            <a:avLst>
+              <a:gd name="adj" fmla="val 4500"/>
+            </a:avLst>
+          </a:prstGeom>
+          <a:solidFill>
+            <a:srgbClr val="FFFFFF"/>
+          </a:solidFill>
+          <a:ln w="12700">
+            <a:solidFill>
+              <a:srgbClr val="CFE0E9"/>
+            </a:solidFill>
+          </a:ln>
+          <a:effectLst/>
+        </p:spPr>
+        <p:style>
+          <a:lnRef idx="1">
+            <a:schemeClr val="accent1"/>
+          </a:lnRef>
+          <a:fillRef idx="3">
+            <a:schemeClr val="accent1"/>
+          </a:fillRef>
+          <a:effectRef idx="2">
+            <a:schemeClr val="accent1"/>
+          </a:effectRef>
+          <a:fontRef idx="minor">
+            <a:schemeClr val="lt1"/>
+          </a:fontRef>
+        </p:style>
+        <p:txBody>
+          <a:bodyPr rtlCol="0" anchor="ctr"/>
+          <a:lstStyle/>
+          <a:p>
+            <a:pPr algn="ctr"/>
+          </a:p>
+        </p:txBody>
+      </p:sp>
+      <p:sp>
+        <p:nvSpPr>
+          <p:cNvPr id="10" name="Rounded Rectangle 9"/>
+          <p:cNvSpPr/>
+          <p:nvPr/>
+        </p:nvSpPr>
+        <p:spPr>
+          <a:xfrm>
+            <a:off x="658368" y="5486400"/>
+            <a:ext cx="50292" cy="1051560"/>
+          </a:xfrm>
+          <a:prstGeom prst="roundRect">
+            <a:avLst>
+              <a:gd name="adj" fmla="val 4500"/>
+            </a:avLst>
+          </a:prstGeom>
+          <a:solidFill>
+            <a:srgbClr val="F2A541"/>
+          </a:solidFill>
+          <a:ln>
+            <a:noFill/>
+          </a:ln>
+          <a:effectLst/>
+        </p:spPr>
+        <p:style>
+          <a:lnRef idx="1">
+            <a:schemeClr val="accent1"/>
+          </a:lnRef>
+          <a:fillRef idx="3">
+            <a:schemeClr val="accent1"/>
+          </a:fillRef>
+          <a:effectRef idx="2">
+            <a:schemeClr val="accent1"/>
+          </a:effectRef>
+          <a:fontRef idx="minor">
+            <a:schemeClr val="lt1"/>
+          </a:fontRef>
+        </p:style>
+        <p:txBody>
+          <a:bodyPr rtlCol="0" anchor="ctr"/>
+          <a:lstStyle/>
+          <a:p>
+            <a:pPr algn="ctr"/>
+          </a:p>
+        </p:txBody>
+      </p:sp>
+      <p:sp>
+        <p:nvSpPr>
+          <p:cNvPr id="11" name="TextBox 10"/>
+          <p:cNvSpPr txBox="1"/>
+          <p:nvPr/>
+        </p:nvSpPr>
+        <p:spPr>
+          <a:xfrm>
+            <a:off x="877824" y="5632704"/>
+            <a:ext cx="10454335" cy="274320"/>
+          </a:xfrm>
+          <a:prstGeom prst="rect">
+            <a:avLst/>
+          </a:prstGeom>
+          <a:noFill/>
+        </p:spPr>
+        <p:txBody>
+          <a:bodyPr wrap="square" anchor="t" lIns="0" rIns="0" tIns="0" bIns="0">
+            <a:spAutoFit/>
+          </a:bodyPr>
+          <a:lstStyle/>
+          <a:p>
+            <a:pPr algn="l">
+              <a:lnSpc>
+                <a:spcPct val="100000"/>
+              </a:lnSpc>
+              <a:spcAft>
+                <a:spcPts val="0"/>
+              </a:spcAft>
+            </a:pPr>
+            <a:r>
+              <a:rPr sz="1150" b="1">
+                <a:solidFill>
+                  <a:srgbClr val="0B3D5C"/>
+                </a:solidFill>
+                <a:latin typeface="Calibri"/>
+              </a:rPr>
+              <a:t>Known limitations, stated plainly.</a:t>
+            </a:r>
+          </a:p>
+        </p:txBody>
+      </p:sp>
+      <p:sp>
+        <p:nvSpPr>
+          <p:cNvPr id="12" name="TextBox 11"/>
+          <p:cNvSpPr txBox="1"/>
+          <p:nvPr/>
+        </p:nvSpPr>
+        <p:spPr>
+          <a:xfrm>
+            <a:off x="877824" y="5943600"/>
+            <a:ext cx="10454335" cy="484632"/>
+          </a:xfrm>
+          <a:prstGeom prst="rect">
+            <a:avLst/>
+          </a:prstGeom>
+          <a:noFill/>
+        </p:spPr>
+        <p:txBody>
+          <a:bodyPr wrap="square" anchor="t" lIns="0" rIns="0" tIns="0" bIns="0">
+            <a:spAutoFit/>
+          </a:bodyPr>
+          <a:lstStyle/>
+          <a:p>
+            <a:pPr algn="l">
+              <a:lnSpc>
+                <a:spcPct val="120000"/>
+              </a:lnSpc>
+              <a:spcAft>
+                <a:spcPts val="0"/>
+              </a:spcAft>
+            </a:pPr>
+            <a:r>
+              <a:rPr sz="1100" b="0">
+                <a:solidFill>
+                  <a:srgbClr val="51697A"/>
+                </a:solidFill>
+                <a:latin typeface="Calibri"/>
+              </a:rPr>
+              <a:t>Euclidean TSP only, one machine, one GA operator set. Results at 6 and 8 threads use SMT, where efficiency past 4 physical cores is expected to fall.</a:t>
             </a:r>
           </a:p>
         </p:txBody>
